--- a/curso/pptx/S31.pptx
+++ b/curso/pptx/S31.pptx
@@ -3890,8 +3890,8 @@
         </p:nvSpPr>
         <p:spPr>
           <a:xfrm>
-            <a:off x="640000" y="420000"/>
-            <a:ext cx="10912000" cy="420000"/>
+            <a:off x="10652000" y="380000"/>
+            <a:ext cx="900000" cy="800000"/>
           </a:xfrm>
           <a:prstGeom prst="rect">
             <a:avLst/>
@@ -3906,17 +3906,17 @@
           <a:p>
             <a:pPr>
               <a:spcAft>
-                <a:spcPts val="810"/>
+                <a:spcPts val="1980"/>
               </a:spcAft>
             </a:pPr>
             <a:r>
-              <a:rPr sz="1800" b="1">
+              <a:rPr sz="4400" b="0">
                 <a:solidFill>
                   <a:srgbClr val="1F2A44"/>
                 </a:solidFill>
                 <a:latin typeface="Nunito Sans"/>
               </a:rPr>
-              <a:t>🦉 Aula de Filosofía</a:t>
+              <a:t>🙃</a:t>
             </a:r>
           </a:p>
         </p:txBody>

--- a/curso/pptx/S31.pptx
+++ b/curso/pptx/S31.pptx
@@ -471,426 +471,6 @@
     </a:lvl9pPr>
   </p:notesStyle>
 </p:notesMaster>
-</file>
-
-<file path=ppt/notesSlides/notesSlide1.xml><?xml version="1.0" encoding="utf-8"?>
-<p:notes xmlns:a="http://schemas.openxmlformats.org/drawingml/2006/main" xmlns:p="http://schemas.openxmlformats.org/presentationml/2006/main" xmlns:r="http://schemas.openxmlformats.org/officeDocument/2006/relationships">
-  <p:cSld>
-    <p:spTree>
-      <p:nvGrpSpPr>
-        <p:cNvPr id="1" name=""/>
-        <p:cNvGrpSpPr/>
-        <p:nvPr/>
-      </p:nvGrpSpPr>
-      <p:grpSpPr>
-        <a:xfrm>
-          <a:off x="0" y="0"/>
-          <a:ext cx="0" cy="0"/>
-          <a:chOff x="0" y="0"/>
-          <a:chExt cx="0" cy="0"/>
-        </a:xfrm>
-      </p:grpSpPr>
-      <p:sp>
-        <p:nvSpPr>
-          <p:cNvPr id="2" name="Slide Image Placeholder 1"/>
-          <p:cNvSpPr>
-            <a:spLocks noGrp="1"/>
-          </p:cNvSpPr>
-          <p:nvPr>
-            <p:ph type="sldImg" idx="2"/>
-          </p:nvPr>
-        </p:nvSpPr>
-        <p:spPr/>
-      </p:sp>
-      <p:sp>
-        <p:nvSpPr>
-          <p:cNvPr id="3" name="Notes Placeholder 2"/>
-          <p:cNvSpPr>
-            <a:spLocks noGrp="1"/>
-          </p:cNvSpPr>
-          <p:nvPr>
-            <p:ph type="body" idx="3" sz="quarter"/>
-          </p:nvPr>
-        </p:nvSpPr>
-        <p:spPr/>
-        <p:txBody>
-          <a:bodyPr/>
-          <a:lstStyle/>
-          <a:p>
-            <a:r>
-              <a:t>3 minutos. Sin apuntes. Es para recordar, no cuenta para nota.</a:t>
-            </a:r>
-          </a:p>
-        </p:txBody>
-      </p:sp>
-      <p:sp>
-        <p:nvSpPr>
-          <p:cNvPr id="4" name="Slide Number Placeholder 3"/>
-          <p:cNvSpPr>
-            <a:spLocks noGrp="1"/>
-          </p:cNvSpPr>
-          <p:nvPr>
-            <p:ph type="sldNum" idx="5" sz="quarter"/>
-          </p:nvPr>
-        </p:nvSpPr>
-        <p:spPr/>
-      </p:sp>
-    </p:spTree>
-  </p:cSld>
-  <p:clrMapOvr>
-    <a:masterClrMapping/>
-  </p:clrMapOvr>
-</p:notes>
-</file>
-
-<file path=ppt/notesSlides/notesSlide2.xml><?xml version="1.0" encoding="utf-8"?>
-<p:notes xmlns:a="http://schemas.openxmlformats.org/drawingml/2006/main" xmlns:p="http://schemas.openxmlformats.org/presentationml/2006/main" xmlns:r="http://schemas.openxmlformats.org/officeDocument/2006/relationships">
-  <p:cSld>
-    <p:spTree>
-      <p:nvGrpSpPr>
-        <p:cNvPr id="1" name=""/>
-        <p:cNvGrpSpPr/>
-        <p:nvPr/>
-      </p:nvGrpSpPr>
-      <p:grpSpPr>
-        <a:xfrm>
-          <a:off x="0" y="0"/>
-          <a:ext cx="0" cy="0"/>
-          <a:chOff x="0" y="0"/>
-          <a:chExt cx="0" cy="0"/>
-        </a:xfrm>
-      </p:grpSpPr>
-      <p:sp>
-        <p:nvSpPr>
-          <p:cNvPr id="2" name="Slide Image Placeholder 1"/>
-          <p:cNvSpPr>
-            <a:spLocks noGrp="1"/>
-          </p:cNvSpPr>
-          <p:nvPr>
-            <p:ph type="sldImg" idx="2"/>
-          </p:nvPr>
-        </p:nvSpPr>
-        <p:spPr/>
-      </p:sp>
-      <p:sp>
-        <p:nvSpPr>
-          <p:cNvPr id="3" name="Notes Placeholder 2"/>
-          <p:cNvSpPr>
-            <a:spLocks noGrp="1"/>
-          </p:cNvSpPr>
-          <p:nvPr>
-            <p:ph type="body" idx="3" sz="quarter"/>
-          </p:nvPr>
-        </p:nvSpPr>
-        <p:spPr/>
-        <p:txBody>
-          <a:bodyPr/>
-          <a:lstStyle/>
-          <a:p>
-            <a:r>
-              <a:t>3 minutos. Sin apuntes. Es para recordar, no cuenta para nota.</a:t>
-            </a:r>
-          </a:p>
-        </p:txBody>
-      </p:sp>
-      <p:sp>
-        <p:nvSpPr>
-          <p:cNvPr id="4" name="Slide Number Placeholder 3"/>
-          <p:cNvSpPr>
-            <a:spLocks noGrp="1"/>
-          </p:cNvSpPr>
-          <p:nvPr>
-            <p:ph type="sldNum" idx="5" sz="quarter"/>
-          </p:nvPr>
-        </p:nvSpPr>
-        <p:spPr/>
-      </p:sp>
-    </p:spTree>
-  </p:cSld>
-  <p:clrMapOvr>
-    <a:masterClrMapping/>
-  </p:clrMapOvr>
-</p:notes>
-</file>
-
-<file path=ppt/notesSlides/notesSlide3.xml><?xml version="1.0" encoding="utf-8"?>
-<p:notes xmlns:a="http://schemas.openxmlformats.org/drawingml/2006/main" xmlns:p="http://schemas.openxmlformats.org/presentationml/2006/main" xmlns:r="http://schemas.openxmlformats.org/officeDocument/2006/relationships">
-  <p:cSld>
-    <p:spTree>
-      <p:nvGrpSpPr>
-        <p:cNvPr id="1" name=""/>
-        <p:cNvGrpSpPr/>
-        <p:nvPr/>
-      </p:nvGrpSpPr>
-      <p:grpSpPr>
-        <a:xfrm>
-          <a:off x="0" y="0"/>
-          <a:ext cx="0" cy="0"/>
-          <a:chOff x="0" y="0"/>
-          <a:chExt cx="0" cy="0"/>
-        </a:xfrm>
-      </p:grpSpPr>
-      <p:sp>
-        <p:nvSpPr>
-          <p:cNvPr id="2" name="Slide Image Placeholder 1"/>
-          <p:cNvSpPr>
-            <a:spLocks noGrp="1"/>
-          </p:cNvSpPr>
-          <p:nvPr>
-            <p:ph type="sldImg" idx="2"/>
-          </p:nvPr>
-        </p:nvSpPr>
-        <p:spPr/>
-      </p:sp>
-      <p:sp>
-        <p:nvSpPr>
-          <p:cNvPr id="3" name="Notes Placeholder 2"/>
-          <p:cNvSpPr>
-            <a:spLocks noGrp="1"/>
-          </p:cNvSpPr>
-          <p:nvPr>
-            <p:ph type="body" idx="3" sz="quarter"/>
-          </p:nvPr>
-        </p:nvSpPr>
-        <p:spPr/>
-        <p:txBody>
-          <a:bodyPr/>
-          <a:lstStyle/>
-          <a:p>
-            <a:r>
-              <a:t>Nadie tiene que contestar: solo pensarlo.</a:t>
-            </a:r>
-          </a:p>
-        </p:txBody>
-      </p:sp>
-      <p:sp>
-        <p:nvSpPr>
-          <p:cNvPr id="4" name="Slide Number Placeholder 3"/>
-          <p:cNvSpPr>
-            <a:spLocks noGrp="1"/>
-          </p:cNvSpPr>
-          <p:nvPr>
-            <p:ph type="sldNum" idx="5" sz="quarter"/>
-          </p:nvPr>
-        </p:nvSpPr>
-        <p:spPr/>
-      </p:sp>
-    </p:spTree>
-  </p:cSld>
-  <p:clrMapOvr>
-    <a:masterClrMapping/>
-  </p:clrMapOvr>
-</p:notes>
-</file>
-
-<file path=ppt/notesSlides/notesSlide4.xml><?xml version="1.0" encoding="utf-8"?>
-<p:notes xmlns:a="http://schemas.openxmlformats.org/drawingml/2006/main" xmlns:p="http://schemas.openxmlformats.org/presentationml/2006/main" xmlns:r="http://schemas.openxmlformats.org/officeDocument/2006/relationships">
-  <p:cSld>
-    <p:spTree>
-      <p:nvGrpSpPr>
-        <p:cNvPr id="1" name=""/>
-        <p:cNvGrpSpPr/>
-        <p:nvPr/>
-      </p:nvGrpSpPr>
-      <p:grpSpPr>
-        <a:xfrm>
-          <a:off x="0" y="0"/>
-          <a:ext cx="0" cy="0"/>
-          <a:chOff x="0" y="0"/>
-          <a:chExt cx="0" cy="0"/>
-        </a:xfrm>
-      </p:grpSpPr>
-      <p:sp>
-        <p:nvSpPr>
-          <p:cNvPr id="2" name="Slide Image Placeholder 1"/>
-          <p:cNvSpPr>
-            <a:spLocks noGrp="1"/>
-          </p:cNvSpPr>
-          <p:nvPr>
-            <p:ph type="sldImg" idx="2"/>
-          </p:nvPr>
-        </p:nvSpPr>
-        <p:spPr/>
-      </p:sp>
-      <p:sp>
-        <p:nvSpPr>
-          <p:cNvPr id="3" name="Notes Placeholder 2"/>
-          <p:cNvSpPr>
-            <a:spLocks noGrp="1"/>
-          </p:cNvSpPr>
-          <p:nvPr>
-            <p:ph type="body" idx="3" sz="quarter"/>
-          </p:nvPr>
-        </p:nvSpPr>
-        <p:spPr/>
-        <p:txBody>
-          <a:bodyPr/>
-          <a:lstStyle/>
-          <a:p>
-            <a:r>
-              <a:t>Dejar unos segundos para que piensen la respuesta fácil antes de enseñar los pasos.</a:t>
-            </a:r>
-          </a:p>
-        </p:txBody>
-      </p:sp>
-      <p:sp>
-        <p:nvSpPr>
-          <p:cNvPr id="4" name="Slide Number Placeholder 3"/>
-          <p:cNvSpPr>
-            <a:spLocks noGrp="1"/>
-          </p:cNvSpPr>
-          <p:nvPr>
-            <p:ph type="sldNum" idx="5" sz="quarter"/>
-          </p:nvPr>
-        </p:nvSpPr>
-        <p:spPr/>
-      </p:sp>
-    </p:spTree>
-  </p:cSld>
-  <p:clrMapOvr>
-    <a:masterClrMapping/>
-  </p:clrMapOvr>
-</p:notes>
-</file>
-
-<file path=ppt/notesSlides/notesSlide5.xml><?xml version="1.0" encoding="utf-8"?>
-<p:notes xmlns:a="http://schemas.openxmlformats.org/drawingml/2006/main" xmlns:p="http://schemas.openxmlformats.org/presentationml/2006/main" xmlns:r="http://schemas.openxmlformats.org/officeDocument/2006/relationships">
-  <p:cSld>
-    <p:spTree>
-      <p:nvGrpSpPr>
-        <p:cNvPr id="1" name=""/>
-        <p:cNvGrpSpPr/>
-        <p:nvPr/>
-      </p:nvGrpSpPr>
-      <p:grpSpPr>
-        <a:xfrm>
-          <a:off x="0" y="0"/>
-          <a:ext cx="0" cy="0"/>
-          <a:chOff x="0" y="0"/>
-          <a:chExt cx="0" cy="0"/>
-        </a:xfrm>
-      </p:grpSpPr>
-      <p:sp>
-        <p:nvSpPr>
-          <p:cNvPr id="2" name="Slide Image Placeholder 1"/>
-          <p:cNvSpPr>
-            <a:spLocks noGrp="1"/>
-          </p:cNvSpPr>
-          <p:nvPr>
-            <p:ph type="sldImg" idx="2"/>
-          </p:nvPr>
-        </p:nvSpPr>
-        <p:spPr/>
-      </p:sp>
-      <p:sp>
-        <p:nvSpPr>
-          <p:cNvPr id="3" name="Notes Placeholder 2"/>
-          <p:cNvSpPr>
-            <a:spLocks noGrp="1"/>
-          </p:cNvSpPr>
-          <p:nvPr>
-            <p:ph type="body" idx="3" sz="quarter"/>
-          </p:nvPr>
-        </p:nvSpPr>
-        <p:spPr/>
-        <p:txBody>
-          <a:bodyPr/>
-          <a:lstStyle/>
-          <a:p>
-            <a:r>
-              <a:t>Dejar 2 minutos para que lo escriban. La diapositiva siguiente muestra el resumen.</a:t>
-            </a:r>
-          </a:p>
-        </p:txBody>
-      </p:sp>
-      <p:sp>
-        <p:nvSpPr>
-          <p:cNvPr id="4" name="Slide Number Placeholder 3"/>
-          <p:cNvSpPr>
-            <a:spLocks noGrp="1"/>
-          </p:cNvSpPr>
-          <p:nvPr>
-            <p:ph type="sldNum" idx="5" sz="quarter"/>
-          </p:nvPr>
-        </p:nvSpPr>
-        <p:spPr/>
-      </p:sp>
-    </p:spTree>
-  </p:cSld>
-  <p:clrMapOvr>
-    <a:masterClrMapping/>
-  </p:clrMapOvr>
-</p:notes>
-</file>
-
-<file path=ppt/notesSlides/notesSlide6.xml><?xml version="1.0" encoding="utf-8"?>
-<p:notes xmlns:a="http://schemas.openxmlformats.org/drawingml/2006/main" xmlns:p="http://schemas.openxmlformats.org/presentationml/2006/main" xmlns:r="http://schemas.openxmlformats.org/officeDocument/2006/relationships">
-  <p:cSld>
-    <p:spTree>
-      <p:nvGrpSpPr>
-        <p:cNvPr id="1" name=""/>
-        <p:cNvGrpSpPr/>
-        <p:nvPr/>
-      </p:nvGrpSpPr>
-      <p:grpSpPr>
-        <a:xfrm>
-          <a:off x="0" y="0"/>
-          <a:ext cx="0" cy="0"/>
-          <a:chOff x="0" y="0"/>
-          <a:chExt cx="0" cy="0"/>
-        </a:xfrm>
-      </p:grpSpPr>
-      <p:sp>
-        <p:nvSpPr>
-          <p:cNvPr id="2" name="Slide Image Placeholder 1"/>
-          <p:cNvSpPr>
-            <a:spLocks noGrp="1"/>
-          </p:cNvSpPr>
-          <p:nvPr>
-            <p:ph type="sldImg" idx="2"/>
-          </p:nvPr>
-        </p:nvSpPr>
-        <p:spPr/>
-      </p:sp>
-      <p:sp>
-        <p:nvSpPr>
-          <p:cNvPr id="3" name="Notes Placeholder 2"/>
-          <p:cNvSpPr>
-            <a:spLocks noGrp="1"/>
-          </p:cNvSpPr>
-          <p:nvPr>
-            <p:ph type="body" idx="3" sz="quarter"/>
-          </p:nvPr>
-        </p:nvSpPr>
-        <p:spPr/>
-        <p:txBody>
-          <a:bodyPr/>
-          <a:lstStyle/>
-          <a:p>
-            <a:r>
-              <a:t>Buscar: «cómo saber si una fuente es fiable» · «evaluar fuentes de información internet»</a:t>
-            </a:r>
-          </a:p>
-        </p:txBody>
-      </p:sp>
-      <p:sp>
-        <p:nvSpPr>
-          <p:cNvPr id="4" name="Slide Number Placeholder 3"/>
-          <p:cNvSpPr>
-            <a:spLocks noGrp="1"/>
-          </p:cNvSpPr>
-          <p:nvPr>
-            <p:ph type="sldNum" idx="5" sz="quarter"/>
-          </p:nvPr>
-        </p:nvSpPr>
-        <p:spPr/>
-      </p:sp>
-    </p:spTree>
-  </p:cSld>
-  <p:clrMapOvr>
-    <a:masterClrMapping/>
-  </p:clrMapOvr>
-</p:notes>
 </file>
 
 <file path=ppt/slideLayouts/slideLayout1.xml><?xml version="1.0" encoding="utf-8"?>

--- a/curso/pptx/S31.pptx
+++ b/curso/pptx/S31.pptx
@@ -4108,7 +4108,7 @@
                 </a:solidFill>
                 <a:latin typeface="Nunito Sans"/>
               </a:rPr>
-              <a:t>Leire busca información sobre una ola de calor. Encuentra un blog sin autor y una noticia de un periódico con datos de la Agencia Estatal de Meteorología.</a:t>
+              <a:t>Una chica busca información sobre una ola de calor. Encuentra un blog sin autor y una noticia de un periódico con datos de la Agencia Estatal de Meteorología.</a:t>
             </a:r>
           </a:p>
         </p:txBody>
@@ -6024,7 +6024,7 @@
                 </a:solidFill>
                 <a:latin typeface="Nunito Sans"/>
               </a:rPr>
-              <a:t>En los experimentos de la unidad 5, Asch estudió la ______; Milgram, la obediencia.  (sesión 30)</a:t>
+              <a:t>En los experimentos de la unidad 5, el de las líneas estudió la ______; el de las descargas, la obediencia.  (sesión 30)</a:t>
             </a:r>
           </a:p>
           <a:p>
@@ -6244,7 +6244,7 @@
                 </a:solidFill>
                 <a:latin typeface="Nunito Sans"/>
               </a:rPr>
-              <a:t>En los experimentos de la unidad 5, Asch estudió la </a:t>
+              <a:t>En los experimentos de la unidad 5, el de las líneas estudió la </a:t>
             </a:r>
             <a:r>
               <a:rPr sz="2600" b="1">
@@ -6262,7 +6262,7 @@
                 </a:solidFill>
                 <a:latin typeface="Nunito Sans"/>
               </a:rPr>
-              <a:t>; Milgram, la obediencia.  (sesión 30)</a:t>
+              <a:t>; el de las descargas, la obediencia.  (sesión 30)</a:t>
             </a:r>
           </a:p>
           <a:p>

--- a/curso/pptx/S31.pptx
+++ b/curso/pptx/S31.pptx
@@ -22,6 +22,7 @@
     <p:sldId id="270" r:id="rId22"/>
     <p:sldId id="271" r:id="rId23"/>
     <p:sldId id="272" r:id="rId24"/>
+    <p:sldId id="273" r:id="rId25"/>
   </p:sldIdLst>
   <p:sldSz cx="12192000" cy="6858000" type="screen4x3"/>
   <p:notesSz cx="6858000" cy="9144000"/>
@@ -3574,7 +3575,7 @@
                 </a:solidFill>
                 <a:latin typeface="Fredoka"/>
               </a:rPr>
-              <a:t>¿Qué es una fuente fiable?</a:t>
+              <a:t>Creer, saber y estar seguro</a:t>
             </a:r>
           </a:p>
         </p:txBody>
@@ -3613,7 +3614,7 @@
                 </a:solidFill>
                 <a:latin typeface="Nunito Sans"/>
               </a:rPr>
-              <a:t>Ninguna fuente es fiable para todo: miramos quién lo dice, cómo lo sabe, qué gana y cómo ha acertado antes.</a:t>
+              <a:t>Sentirse seguro no es lo mismo que saber. Solemos decir que alguien sabe algo cuando lo cree, es verdad y tiene buenas razones.</a:t>
             </a:r>
           </a:p>
         </p:txBody>
@@ -3632,7 +3633,7 @@
     <p:bg>
       <p:bgPr>
         <a:solidFill>
-          <a:srgbClr val="FBF7EF"/>
+          <a:srgbClr val="1F2A44"/>
         </a:solidFill>
         <a:effectLst/>
       </p:bgPr>
@@ -3652,8 +3653,8 @@
         </p:nvSpPr>
         <p:spPr>
           <a:xfrm>
-            <a:off x="640000" y="380000"/>
-            <a:ext cx="10912000" cy="420000"/>
+            <a:off x="640000" y="2300000"/>
+            <a:ext cx="10912000" cy="500000"/>
           </a:xfrm>
           <a:prstGeom prst="rect">
             <a:avLst/>
@@ -3668,17 +3669,17 @@
           <a:p>
             <a:pPr>
               <a:spcAft>
-                <a:spcPts val="630"/>
-              </a:spcAft>
-            </a:pPr>
-            <a:r>
-              <a:rPr sz="1400" b="1">
-                <a:solidFill>
-                  <a:srgbClr val="E8793A"/>
-                </a:solidFill>
-                <a:latin typeface="Nunito Sans"/>
-              </a:rPr>
-              <a:t>BLOQUE 2 · CASOS RESUELTOS</a:t>
+                <a:spcPts val="810"/>
+              </a:spcAft>
+            </a:pPr>
+            <a:r>
+              <a:rPr sz="1800" b="1">
+                <a:solidFill>
+                  <a:srgbClr val="F4B183"/>
+                </a:solidFill>
+                <a:latin typeface="Nunito Sans"/>
+              </a:rPr>
+              <a:t>BLOQUE 2</a:t>
             </a:r>
           </a:p>
         </p:txBody>
@@ -3691,7 +3692,7 @@
         </p:nvSpPr>
         <p:spPr>
           <a:xfrm>
-            <a:off x="640000" y="760000"/>
+            <a:off x="640000" y="2800000"/>
             <a:ext cx="10912000" cy="800000"/>
           </a:xfrm>
           <a:prstGeom prst="rect">
@@ -3707,222 +3708,17 @@
           <a:p>
             <a:pPr>
               <a:spcAft>
-                <a:spcPts val="1710"/>
-              </a:spcAft>
-            </a:pPr>
-            <a:r>
-              <a:rPr sz="3800" b="1">
-                <a:solidFill>
-                  <a:srgbClr val="1F2A44"/>
+                <a:spcPts val="2160"/>
+              </a:spcAft>
+            </a:pPr>
+            <a:r>
+              <a:rPr sz="4800" b="1">
+                <a:solidFill>
+                  <a:srgbClr val="FBF7EF"/>
                 </a:solidFill>
                 <a:latin typeface="Fredoka"/>
               </a:rPr>
-              <a:t>Caso 1 · El metro</a:t>
-            </a:r>
-          </a:p>
-        </p:txBody>
-      </p:sp>
-      <p:sp>
-        <p:nvSpPr>
-          <p:cNvPr id="4" name="Rectangle 3"/>
-          <p:cNvSpPr/>
-          <p:nvPr/>
-        </p:nvSpPr>
-        <p:spPr>
-          <a:xfrm>
-            <a:off x="640000" y="1600000"/>
-            <a:ext cx="10912000" cy="1100000"/>
-          </a:xfrm>
-          <a:prstGeom prst="rect">
-            <a:avLst/>
-          </a:prstGeom>
-          <a:solidFill>
-            <a:srgbClr val="FFFFFF"/>
-          </a:solidFill>
-          <a:ln>
-            <a:noFill/>
-          </a:ln>
-        </p:spPr>
-        <p:style>
-          <a:lnRef idx="1">
-            <a:schemeClr val="accent1"/>
-          </a:lnRef>
-          <a:fillRef idx="3">
-            <a:schemeClr val="accent1"/>
-          </a:fillRef>
-          <a:effectRef idx="2">
-            <a:schemeClr val="accent1"/>
-          </a:effectRef>
-          <a:fontRef idx="minor">
-            <a:schemeClr val="lt1"/>
-          </a:fontRef>
-        </p:style>
-        <p:txBody>
-          <a:bodyPr rtlCol="0" anchor="ctr"/>
-          <a:lstStyle/>
-          <a:p>
-            <a:pPr algn="ctr"/>
-          </a:p>
-        </p:txBody>
-      </p:sp>
-      <p:sp>
-        <p:nvSpPr>
-          <p:cNvPr id="5" name="TextBox 4"/>
-          <p:cNvSpPr txBox="1"/>
-          <p:nvPr/>
-        </p:nvSpPr>
-        <p:spPr>
-          <a:xfrm>
-            <a:off x="840000" y="1650000"/>
-            <a:ext cx="10512000" cy="1000000"/>
-          </a:xfrm>
-          <a:prstGeom prst="rect">
-            <a:avLst/>
-          </a:prstGeom>
-          <a:noFill/>
-        </p:spPr>
-        <p:txBody>
-          <a:bodyPr wrap="square" anchor="ctr">
-            <a:spAutoFit/>
-          </a:bodyPr>
-          <a:lstStyle/>
-          <a:p>
-            <a:pPr>
-              <a:spcAft>
-                <a:spcPts val="1170"/>
-              </a:spcAft>
-            </a:pPr>
-            <a:r>
-              <a:rPr sz="2600" b="1">
-                <a:solidFill>
-                  <a:srgbClr val="1F2A44"/>
-                </a:solidFill>
-                <a:latin typeface="Nunito Sans"/>
-              </a:rPr>
-              <a:t>Tres mensajes dicen que mañana cierra el metro: uno de un amigo, otro de una cuenta sin nombre y otro de la web oficial del metro.</a:t>
-            </a:r>
-          </a:p>
-        </p:txBody>
-      </p:sp>
-      <p:sp>
-        <p:nvSpPr>
-          <p:cNvPr id="6" name="TextBox 5"/>
-          <p:cNvSpPr txBox="1"/>
-          <p:nvPr/>
-        </p:nvSpPr>
-        <p:spPr>
-          <a:xfrm>
-            <a:off x="640000" y="2900000"/>
-            <a:ext cx="10912000" cy="3500000"/>
-          </a:xfrm>
-          <a:prstGeom prst="rect">
-            <a:avLst/>
-          </a:prstGeom>
-          <a:noFill/>
-        </p:spPr>
-        <p:txBody>
-          <a:bodyPr wrap="square">
-            <a:spAutoFit/>
-          </a:bodyPr>
-          <a:lstStyle/>
-          <a:p>
-            <a:pPr>
-              <a:spcAft>
-                <a:spcPts val="1080"/>
-              </a:spcAft>
-            </a:pPr>
-            <a:r>
-              <a:rPr sz="2400" b="1">
-                <a:solidFill>
-                  <a:srgbClr val="E8793A"/>
-                </a:solidFill>
-                <a:latin typeface="Nunito Sans"/>
-              </a:rPr>
-              <a:t>1. </a:t>
-            </a:r>
-            <a:r>
-              <a:rPr sz="2400" b="0">
-                <a:solidFill>
-                  <a:srgbClr val="1F2A44"/>
-                </a:solidFill>
-                <a:latin typeface="Nunito Sans"/>
-              </a:rPr>
-              <a:t>El amigo: es de segunda mano. ¿Dónde lo leyó?</a:t>
-            </a:r>
-          </a:p>
-          <a:p>
-            <a:pPr>
-              <a:spcAft>
-                <a:spcPts val="1080"/>
-              </a:spcAft>
-            </a:pPr>
-            <a:r>
-              <a:rPr sz="2400" b="1">
-                <a:solidFill>
-                  <a:srgbClr val="E8793A"/>
-                </a:solidFill>
-                <a:latin typeface="Nunito Sans"/>
-              </a:rPr>
-              <a:t>2. </a:t>
-            </a:r>
-            <a:r>
-              <a:rPr sz="2400" b="0">
-                <a:solidFill>
-                  <a:srgbClr val="1F2A44"/>
-                </a:solidFill>
-                <a:latin typeface="Nunito Sans"/>
-              </a:rPr>
-              <a:t>La cuenta sin nombre: no sé quién es ni cómo lo sabe.</a:t>
-            </a:r>
-          </a:p>
-          <a:p>
-            <a:pPr>
-              <a:spcAft>
-                <a:spcPts val="1080"/>
-              </a:spcAft>
-            </a:pPr>
-            <a:r>
-              <a:rPr sz="2400" b="1">
-                <a:solidFill>
-                  <a:srgbClr val="E8793A"/>
-                </a:solidFill>
-                <a:latin typeface="Nunito Sans"/>
-              </a:rPr>
-              <a:t>3. </a:t>
-            </a:r>
-            <a:r>
-              <a:rPr sz="2400" b="0">
-                <a:solidFill>
-                  <a:srgbClr val="1F2A44"/>
-                </a:solidFill>
-                <a:latin typeface="Nunito Sans"/>
-              </a:rPr>
-              <a:t>La web oficial: es la fuente original, porque el metro es quien decide si cierra.</a:t>
-            </a:r>
-          </a:p>
-          <a:p>
-            <a:pPr>
-              <a:spcAft>
-                <a:spcPts val="1080"/>
-              </a:spcAft>
-            </a:pPr>
-            <a:r>
-              <a:rPr sz="2400" b="1">
-                <a:solidFill>
-                  <a:srgbClr val="E8793A"/>
-                </a:solidFill>
-                <a:latin typeface="Nunito Sans"/>
-              </a:rPr>
-              <a:t>4. </a:t>
-            </a:r>
-            <a:r>
-              <a:rPr sz="2400" b="0">
-                <a:solidFill>
-                  <a:srgbClr val="1F2A44"/>
-                </a:solidFill>
-                <a:latin typeface="Nunito Sans"/>
-              </a:rPr>
-              <a:t>Conclusión: hago caso a la web oficial. Si no dice nada, espero antes de creérmelo.</a:t>
+              <a:t>Casos resueltos</a:t>
             </a:r>
           </a:p>
         </p:txBody>
@@ -4026,7 +3822,7 @@
                 </a:solidFill>
                 <a:latin typeface="Fredoka"/>
               </a:rPr>
-              <a:t>Caso 2 · La ola de calor</a:t>
+              <a:t>Caso 1 · Las llaves</a:t>
             </a:r>
           </a:p>
         </p:txBody>
@@ -4108,7 +3904,7 @@
                 </a:solidFill>
                 <a:latin typeface="Nunito Sans"/>
               </a:rPr>
-              <a:t>Una chica busca información sobre una ola de calor. Encuentra un blog sin autor y una noticia de un periódico con datos de la Agencia Estatal de Meteorología.</a:t>
+              <a:t>Un chico está segurísimo: «Las llaves están en la mochila». No están. Al final aparecen en la mesa de la cocina.</a:t>
             </a:r>
           </a:p>
         </p:txBody>
@@ -4156,7 +3952,7 @@
                 </a:solidFill>
                 <a:latin typeface="Nunito Sans"/>
               </a:rPr>
-              <a:t>¿Quién lo dice? El blog, no lo sé. El periódico tiene nombre y periodista.</a:t>
+              <a:t>¿Estaba seguro? Sí, muchísimo.</a:t>
             </a:r>
           </a:p>
           <a:p>
@@ -4181,7 +3977,7 @@
                 </a:solidFill>
                 <a:latin typeface="Nunito Sans"/>
               </a:rPr>
-              <a:t>¿Cómo lo sabe? El periódico cita a la Agencia de Meteorología, que mide las temperaturas.</a:t>
+              <a:t>¿Era verdad lo que creía? No: estaban en la cocina.</a:t>
             </a:r>
           </a:p>
           <a:p>
@@ -4206,7 +4002,7 @@
                 </a:solidFill>
                 <a:latin typeface="Nunito Sans"/>
               </a:rPr>
-              <a:t>Mejor aún: puedo ir a la web de la Agencia, la fuente original.</a:t>
+              <a:t>Entonces, ¿lo sabía? No. Solo lo creía, y con mucha fuerza.</a:t>
             </a:r>
           </a:p>
           <a:p>
@@ -4231,7 +4027,7 @@
                 </a:solidFill>
                 <a:latin typeface="Nunito Sans"/>
               </a:rPr>
-              <a:t>Conclusión: para este dato, el periódico es mejor fuente que el blog, y la Agencia mejor que los dos.</a:t>
+              <a:t>Conclusión: sentirse seguro no es lo mismo que saber.</a:t>
             </a:r>
           </a:p>
         </p:txBody>
@@ -4335,7 +4131,7 @@
                 </a:solidFill>
                 <a:latin typeface="Fredoka"/>
               </a:rPr>
-              <a:t>Caso 3 · La web de la marca</a:t>
+              <a:t>Caso 2 · Acertar por suerte</a:t>
             </a:r>
           </a:p>
         </p:txBody>
@@ -4417,7 +4213,7 @@
                 </a:solidFill>
                 <a:latin typeface="Nunito Sans"/>
               </a:rPr>
-              <a:t>Una web dice que una bebida energética «mejora las notas». La web es de la marca que la vende.</a:t>
+              <a:t>Un chico no ha estudiado. En una pregunta de test elige la b) al azar… y acierta.</a:t>
             </a:r>
           </a:p>
         </p:txBody>
@@ -4465,7 +4261,7 @@
                 </a:solidFill>
                 <a:latin typeface="Nunito Sans"/>
               </a:rPr>
-              <a:t>¿Quién lo dice? La propia marca.</a:t>
+              <a:t>¿Su respuesta es verdadera? Sí.</a:t>
             </a:r>
           </a:p>
           <a:p>
@@ -4490,7 +4286,7 @@
                 </a:solidFill>
                 <a:latin typeface="Nunito Sans"/>
               </a:rPr>
-              <a:t>¿Cómo lo sabe? No cita ningún estudio.</a:t>
+              <a:t>¿Tenía razones para elegir la b)? No: la eligió al azar.</a:t>
             </a:r>
           </a:p>
           <a:p>
@@ -4515,7 +4311,7 @@
                 </a:solidFill>
                 <a:latin typeface="Nunito Sans"/>
               </a:rPr>
-              <a:t>¿Qué gana? Vender más: tiene un interés claro.</a:t>
+              <a:t>¿Sabía la respuesta? No: acertó por suerte.</a:t>
             </a:r>
           </a:p>
           <a:p>
@@ -4540,7 +4336,7 @@
                 </a:solidFill>
                 <a:latin typeface="Nunito Sans"/>
               </a:rPr>
-              <a:t>Conclusión: para este tema, no es una fuente fiable. Busco qué dicen médicos o nutricionistas que no la vendan.</a:t>
+              <a:t>Conclusión: para saber no basta con acertar. Hacen falta buenas razones.</a:t>
             </a:r>
           </a:p>
         </p:txBody>
@@ -4554,6 +4350,290 @@
 </file>
 
 <file path=ppt/slides/slide13.xml><?xml version="1.0" encoding="utf-8"?>
+<p:sld xmlns:a="http://schemas.openxmlformats.org/drawingml/2006/main" xmlns:p="http://schemas.openxmlformats.org/presentationml/2006/main" xmlns:r="http://schemas.openxmlformats.org/officeDocument/2006/relationships">
+  <p:cSld>
+    <p:bg>
+      <p:bgPr>
+        <a:solidFill>
+          <a:srgbClr val="FBF7EF"/>
+        </a:solidFill>
+        <a:effectLst/>
+      </p:bgPr>
+    </p:bg>
+    <p:spTree>
+      <p:nvGrpSpPr>
+        <p:cNvPr id="1" name=""/>
+        <p:cNvGrpSpPr/>
+        <p:nvPr/>
+      </p:nvGrpSpPr>
+      <p:grpSpPr/>
+      <p:sp>
+        <p:nvSpPr>
+          <p:cNvPr id="2" name="TextBox 1"/>
+          <p:cNvSpPr txBox="1"/>
+          <p:nvPr/>
+        </p:nvSpPr>
+        <p:spPr>
+          <a:xfrm>
+            <a:off x="640000" y="380000"/>
+            <a:ext cx="10912000" cy="420000"/>
+          </a:xfrm>
+          <a:prstGeom prst="rect">
+            <a:avLst/>
+          </a:prstGeom>
+          <a:noFill/>
+        </p:spPr>
+        <p:txBody>
+          <a:bodyPr wrap="square">
+            <a:spAutoFit/>
+          </a:bodyPr>
+          <a:lstStyle/>
+          <a:p>
+            <a:pPr>
+              <a:spcAft>
+                <a:spcPts val="630"/>
+              </a:spcAft>
+            </a:pPr>
+            <a:r>
+              <a:rPr sz="1400" b="1">
+                <a:solidFill>
+                  <a:srgbClr val="E8793A"/>
+                </a:solidFill>
+                <a:latin typeface="Nunito Sans"/>
+              </a:rPr>
+              <a:t>BLOQUE 2 · CASOS RESUELTOS</a:t>
+            </a:r>
+          </a:p>
+        </p:txBody>
+      </p:sp>
+      <p:sp>
+        <p:nvSpPr>
+          <p:cNvPr id="3" name="TextBox 2"/>
+          <p:cNvSpPr txBox="1"/>
+          <p:nvPr/>
+        </p:nvSpPr>
+        <p:spPr>
+          <a:xfrm>
+            <a:off x="640000" y="760000"/>
+            <a:ext cx="10912000" cy="800000"/>
+          </a:xfrm>
+          <a:prstGeom prst="rect">
+            <a:avLst/>
+          </a:prstGeom>
+          <a:noFill/>
+        </p:spPr>
+        <p:txBody>
+          <a:bodyPr wrap="square">
+            <a:spAutoFit/>
+          </a:bodyPr>
+          <a:lstStyle/>
+          <a:p>
+            <a:pPr>
+              <a:spcAft>
+                <a:spcPts val="1710"/>
+              </a:spcAft>
+            </a:pPr>
+            <a:r>
+              <a:rPr sz="3800" b="1">
+                <a:solidFill>
+                  <a:srgbClr val="1F2A44"/>
+                </a:solidFill>
+                <a:latin typeface="Fredoka"/>
+              </a:rPr>
+              <a:t>Caso 3 · Saber de verdad</a:t>
+            </a:r>
+          </a:p>
+        </p:txBody>
+      </p:sp>
+      <p:sp>
+        <p:nvSpPr>
+          <p:cNvPr id="4" name="Rectangle 3"/>
+          <p:cNvSpPr/>
+          <p:nvPr/>
+        </p:nvSpPr>
+        <p:spPr>
+          <a:xfrm>
+            <a:off x="640000" y="1600000"/>
+            <a:ext cx="10912000" cy="1100000"/>
+          </a:xfrm>
+          <a:prstGeom prst="rect">
+            <a:avLst/>
+          </a:prstGeom>
+          <a:solidFill>
+            <a:srgbClr val="FFFFFF"/>
+          </a:solidFill>
+          <a:ln>
+            <a:noFill/>
+          </a:ln>
+        </p:spPr>
+        <p:style>
+          <a:lnRef idx="1">
+            <a:schemeClr val="accent1"/>
+          </a:lnRef>
+          <a:fillRef idx="3">
+            <a:schemeClr val="accent1"/>
+          </a:fillRef>
+          <a:effectRef idx="2">
+            <a:schemeClr val="accent1"/>
+          </a:effectRef>
+          <a:fontRef idx="minor">
+            <a:schemeClr val="lt1"/>
+          </a:fontRef>
+        </p:style>
+        <p:txBody>
+          <a:bodyPr rtlCol="0" anchor="ctr"/>
+          <a:lstStyle/>
+          <a:p>
+            <a:pPr algn="ctr"/>
+          </a:p>
+        </p:txBody>
+      </p:sp>
+      <p:sp>
+        <p:nvSpPr>
+          <p:cNvPr id="5" name="TextBox 4"/>
+          <p:cNvSpPr txBox="1"/>
+          <p:nvPr/>
+        </p:nvSpPr>
+        <p:spPr>
+          <a:xfrm>
+            <a:off x="840000" y="1650000"/>
+            <a:ext cx="10512000" cy="1000000"/>
+          </a:xfrm>
+          <a:prstGeom prst="rect">
+            <a:avLst/>
+          </a:prstGeom>
+          <a:noFill/>
+        </p:spPr>
+        <p:txBody>
+          <a:bodyPr wrap="square" anchor="ctr">
+            <a:spAutoFit/>
+          </a:bodyPr>
+          <a:lstStyle/>
+          <a:p>
+            <a:pPr>
+              <a:spcAft>
+                <a:spcPts val="1170"/>
+              </a:spcAft>
+            </a:pPr>
+            <a:r>
+              <a:rPr sz="2600" b="1">
+                <a:solidFill>
+                  <a:srgbClr val="1F2A44"/>
+                </a:solidFill>
+                <a:latin typeface="Nunito Sans"/>
+              </a:rPr>
+              <a:t>Una chica dice: «El agua hierve a 100 grados a nivel del mar». Lo explicaron en clase y ella lo midió en el laboratorio.</a:t>
+            </a:r>
+          </a:p>
+        </p:txBody>
+      </p:sp>
+      <p:sp>
+        <p:nvSpPr>
+          <p:cNvPr id="6" name="TextBox 5"/>
+          <p:cNvSpPr txBox="1"/>
+          <p:nvPr/>
+        </p:nvSpPr>
+        <p:spPr>
+          <a:xfrm>
+            <a:off x="640000" y="2900000"/>
+            <a:ext cx="10912000" cy="3500000"/>
+          </a:xfrm>
+          <a:prstGeom prst="rect">
+            <a:avLst/>
+          </a:prstGeom>
+          <a:noFill/>
+        </p:spPr>
+        <p:txBody>
+          <a:bodyPr wrap="square">
+            <a:spAutoFit/>
+          </a:bodyPr>
+          <a:lstStyle/>
+          <a:p>
+            <a:pPr>
+              <a:spcAft>
+                <a:spcPts val="1080"/>
+              </a:spcAft>
+            </a:pPr>
+            <a:r>
+              <a:rPr sz="2400" b="1">
+                <a:solidFill>
+                  <a:srgbClr val="E8793A"/>
+                </a:solidFill>
+                <a:latin typeface="Nunito Sans"/>
+              </a:rPr>
+              <a:t>1. </a:t>
+            </a:r>
+            <a:r>
+              <a:rPr sz="2400" b="0">
+                <a:solidFill>
+                  <a:srgbClr val="1F2A44"/>
+                </a:solidFill>
+                <a:latin typeface="Nunito Sans"/>
+              </a:rPr>
+              <a:t>¿Es verdad? Sí: es un dato muy comprobado.</a:t>
+            </a:r>
+          </a:p>
+          <a:p>
+            <a:pPr>
+              <a:spcAft>
+                <a:spcPts val="1080"/>
+              </a:spcAft>
+            </a:pPr>
+            <a:r>
+              <a:rPr sz="2400" b="1">
+                <a:solidFill>
+                  <a:srgbClr val="E8793A"/>
+                </a:solidFill>
+                <a:latin typeface="Nunito Sans"/>
+              </a:rPr>
+              <a:t>2. </a:t>
+            </a:r>
+            <a:r>
+              <a:rPr sz="2400" b="0">
+                <a:solidFill>
+                  <a:srgbClr val="1F2A44"/>
+                </a:solidFill>
+                <a:latin typeface="Nunito Sans"/>
+              </a:rPr>
+              <a:t>¿Tiene buenas razones? Sí: se lo explicaron y lo midió ella misma.</a:t>
+            </a:r>
+          </a:p>
+          <a:p>
+            <a:pPr>
+              <a:spcAft>
+                <a:spcPts val="1080"/>
+              </a:spcAft>
+            </a:pPr>
+            <a:r>
+              <a:rPr sz="2400" b="1">
+                <a:solidFill>
+                  <a:srgbClr val="E8793A"/>
+                </a:solidFill>
+                <a:latin typeface="Nunito Sans"/>
+              </a:rPr>
+              <a:t>3. </a:t>
+            </a:r>
+            <a:r>
+              <a:rPr sz="2400" b="0">
+                <a:solidFill>
+                  <a:srgbClr val="1F2A44"/>
+                </a:solidFill>
+                <a:latin typeface="Nunito Sans"/>
+              </a:rPr>
+              <a:t>Conclusión: esa chica lo sabe. Es verdad y tiene buenas razones.</a:t>
+            </a:r>
+          </a:p>
+        </p:txBody>
+      </p:sp>
+    </p:spTree>
+  </p:cSld>
+  <p:clrMapOvr>
+    <a:masterClrMapping/>
+  </p:clrMapOvr>
+</p:sld>
+</file>
+
+<file path=ppt/slides/slide14.xml><?xml version="1.0" encoding="utf-8"?>
 <p:sld xmlns:a="http://schemas.openxmlformats.org/drawingml/2006/main" xmlns:p="http://schemas.openxmlformats.org/presentationml/2006/main" xmlns:r="http://schemas.openxmlformats.org/officeDocument/2006/relationships">
   <p:cSld>
     <p:bg>
@@ -4644,7 +4724,7 @@
                 </a:solidFill>
                 <a:latin typeface="Fredoka"/>
               </a:rPr>
-              <a:t>⚠ El periódico que se equivocó</a:t>
+              <a:t>⚠ El reloj parado</a:t>
             </a:r>
           </a:p>
         </p:txBody>
@@ -4726,7 +4806,7 @@
                 </a:solidFill>
                 <a:latin typeface="Nunito Sans"/>
               </a:rPr>
-              <a:t>Un periódico serio publica que un jugador del Athletic ficha por otro equipo. Al día siguiente escribe: «Nos equivocamos: no es verdad». (Ejemplo inventado.)</a:t>
+              <a:t>Una chica mira el reloj del pasillo: marca las 10:15. Son las 10:15. Pero el reloj está parado desde ayer a las 10:15.</a:t>
             </a:r>
           </a:p>
         </p:txBody>
@@ -4774,7 +4854,7 @@
                 </a:solidFill>
                 <a:latin typeface="Nunito Sans"/>
               </a:rPr>
-              <a:t>Se ha equivocado. ¿Entonces ya no es una fuente fiable?</a:t>
+              <a:t>¿Sabe esa chica qué hora es?</a:t>
             </a:r>
           </a:p>
           <a:p>
@@ -4799,7 +4879,7 @@
                 </a:solidFill>
                 <a:latin typeface="Nunito Sans"/>
               </a:rPr>
-              <a:t>Todos los medios se equivocan alguna vez, también los mejores.</a:t>
+              <a:t>¿Lo cree? Sí. ¿Es verdad? Sí: son las 10:15.</a:t>
             </a:r>
           </a:p>
           <a:p>
@@ -4824,7 +4904,7 @@
                 </a:solidFill>
                 <a:latin typeface="Nunito Sans"/>
               </a:rPr>
-              <a:t>Este ha corregido rápido y en público: eso es una señal a favor.</a:t>
+              <a:t>¿Tiene una razón? Sí: los relojes del pasillo suelen funcionar.</a:t>
             </a:r>
           </a:p>
           <a:p>
@@ -4849,7 +4929,7 @@
                 </a:solidFill>
                 <a:latin typeface="Nunito Sans"/>
               </a:rPr>
-              <a:t>Una cuenta que nunca corrige nada no es mejor: solo esconde sus errores.</a:t>
+              <a:t>Y aun así acierta por suerte: el reloj no funciona.</a:t>
             </a:r>
           </a:p>
           <a:p>
@@ -4874,168 +4954,7 @@
                 </a:solidFill>
                 <a:latin typeface="Nunito Sans"/>
               </a:rPr>
-              <a:t>Conclusión: fiable no es </a:t>
-            </a:r>
-            <a:r>
-              <a:rPr sz="2400" b="1">
-                <a:solidFill>
-                  <a:srgbClr val="1F2A44"/>
-                </a:solidFill>
-                <a:latin typeface="Nunito Sans"/>
-              </a:rPr>
-              <a:t>infalible</a:t>
-            </a:r>
-            <a:r>
-              <a:rPr sz="2400" b="0">
-                <a:solidFill>
-                  <a:srgbClr val="1F2A44"/>
-                </a:solidFill>
-                <a:latin typeface="Nunito Sans"/>
-              </a:rPr>
-              <a:t> (que nunca falla). Es quien suele acertar y corrige cuando falla.</a:t>
-            </a:r>
-          </a:p>
-        </p:txBody>
-      </p:sp>
-    </p:spTree>
-  </p:cSld>
-  <p:clrMapOvr>
-    <a:masterClrMapping/>
-  </p:clrMapOvr>
-</p:sld>
-</file>
-
-<file path=ppt/slides/slide14.xml><?xml version="1.0" encoding="utf-8"?>
-<p:sld xmlns:a="http://schemas.openxmlformats.org/drawingml/2006/main" xmlns:p="http://schemas.openxmlformats.org/presentationml/2006/main" xmlns:r="http://schemas.openxmlformats.org/officeDocument/2006/relationships">
-  <p:cSld>
-    <p:bg>
-      <p:bgPr>
-        <a:solidFill>
-          <a:srgbClr val="FBF7EF"/>
-        </a:solidFill>
-        <a:effectLst/>
-      </p:bgPr>
-    </p:bg>
-    <p:spTree>
-      <p:nvGrpSpPr>
-        <p:cNvPr id="1" name=""/>
-        <p:cNvGrpSpPr/>
-        <p:nvPr/>
-      </p:nvGrpSpPr>
-      <p:grpSpPr/>
-      <p:sp>
-        <p:nvSpPr>
-          <p:cNvPr id="2" name="TextBox 1"/>
-          <p:cNvSpPr txBox="1"/>
-          <p:nvPr/>
-        </p:nvSpPr>
-        <p:spPr>
-          <a:xfrm>
-            <a:off x="640000" y="380000"/>
-            <a:ext cx="10912000" cy="420000"/>
-          </a:xfrm>
-          <a:prstGeom prst="rect">
-            <a:avLst/>
-          </a:prstGeom>
-          <a:noFill/>
-        </p:spPr>
-        <p:txBody>
-          <a:bodyPr wrap="square">
-            <a:spAutoFit/>
-          </a:bodyPr>
-          <a:lstStyle/>
-          <a:p>
-            <a:pPr>
-              <a:spcAft>
-                <a:spcPts val="630"/>
-              </a:spcAft>
-            </a:pPr>
-            <a:r>
-              <a:rPr sz="1400" b="1">
-                <a:solidFill>
-                  <a:srgbClr val="E8793A"/>
-                </a:solidFill>
-                <a:latin typeface="Nunito Sans"/>
-              </a:rPr>
-              <a:t>LO DE HOY EN TRES LÍNEAS</a:t>
-            </a:r>
-          </a:p>
-        </p:txBody>
-      </p:sp>
-      <p:sp>
-        <p:nvSpPr>
-          <p:cNvPr id="3" name="TextBox 2"/>
-          <p:cNvSpPr txBox="1"/>
-          <p:nvPr/>
-        </p:nvSpPr>
-        <p:spPr>
-          <a:xfrm>
-            <a:off x="640000" y="760000"/>
-            <a:ext cx="10912000" cy="800000"/>
-          </a:xfrm>
-          <a:prstGeom prst="rect">
-            <a:avLst/>
-          </a:prstGeom>
-          <a:noFill/>
-        </p:spPr>
-        <p:txBody>
-          <a:bodyPr wrap="square">
-            <a:spAutoFit/>
-          </a:bodyPr>
-          <a:lstStyle/>
-          <a:p>
-            <a:pPr>
-              <a:spcAft>
-                <a:spcPts val="1710"/>
-              </a:spcAft>
-            </a:pPr>
-            <a:r>
-              <a:rPr sz="3800" b="1">
-                <a:solidFill>
-                  <a:srgbClr val="1F2A44"/>
-                </a:solidFill>
-                <a:latin typeface="Fredoka"/>
-              </a:rPr>
-              <a:t>Escríbelo tú primero, sin mirar</a:t>
-            </a:r>
-          </a:p>
-        </p:txBody>
-      </p:sp>
-      <p:sp>
-        <p:nvSpPr>
-          <p:cNvPr id="4" name="TextBox 3"/>
-          <p:cNvSpPr txBox="1"/>
-          <p:nvPr/>
-        </p:nvSpPr>
-        <p:spPr>
-          <a:xfrm>
-            <a:off x="640000" y="1800000"/>
-            <a:ext cx="10912000" cy="1500000"/>
-          </a:xfrm>
-          <a:prstGeom prst="rect">
-            <a:avLst/>
-          </a:prstGeom>
-          <a:noFill/>
-        </p:spPr>
-        <p:txBody>
-          <a:bodyPr wrap="square">
-            <a:spAutoFit/>
-          </a:bodyPr>
-          <a:lstStyle/>
-          <a:p>
-            <a:pPr>
-              <a:spcAft>
-                <a:spcPts val="1170"/>
-              </a:spcAft>
-            </a:pPr>
-            <a:r>
-              <a:rPr sz="2600" b="0">
-                <a:solidFill>
-                  <a:srgbClr val="4A5568"/>
-                </a:solidFill>
-                <a:latin typeface="Nunito Sans"/>
-              </a:rPr>
-              <a:t>Dos minutos. Después lo comparamos.</a:t>
+              <a:t>Conclusión: la definición de saber no es perfecta. Los filósofos lo siguen discutiendo.</a:t>
             </a:r>
           </a:p>
         </p:txBody>
@@ -5113,8 +5032,8 @@
         </p:nvSpPr>
         <p:spPr>
           <a:xfrm>
-            <a:off x="640000" y="1300000"/>
-            <a:ext cx="10912000" cy="4800000"/>
+            <a:off x="640000" y="760000"/>
+            <a:ext cx="10912000" cy="800000"/>
           </a:xfrm>
           <a:prstGeom prst="rect">
             <a:avLst/>
@@ -5129,76 +5048,56 @@
           <a:p>
             <a:pPr>
               <a:spcAft>
-                <a:spcPts val="1350"/>
-              </a:spcAft>
-            </a:pPr>
-            <a:r>
-              <a:rPr sz="3000" b="1">
-                <a:solidFill>
-                  <a:srgbClr val="E8793A"/>
-                </a:solidFill>
-                <a:latin typeface="Nunito Sans"/>
-              </a:rPr>
-              <a:t>1. </a:t>
-            </a:r>
-            <a:r>
-              <a:rPr sz="3000" b="0">
+                <a:spcPts val="1710"/>
+              </a:spcAft>
+            </a:pPr>
+            <a:r>
+              <a:rPr sz="3800" b="1">
                 <a:solidFill>
                   <a:srgbClr val="1F2A44"/>
                 </a:solidFill>
-                <a:latin typeface="Nunito Sans"/>
-              </a:rPr>
-              <a:t>Una fuente es de donde sale una información; la original suele valer más.</a:t>
-            </a:r>
-          </a:p>
-          <a:p>
-            <a:pPr>
-              <a:spcAft>
-                <a:spcPts val="1350"/>
-              </a:spcAft>
-            </a:pPr>
-            <a:r>
-              <a:rPr sz="3000" b="1">
-                <a:solidFill>
-                  <a:srgbClr val="E8793A"/>
-                </a:solidFill>
-                <a:latin typeface="Nunito Sans"/>
-              </a:rPr>
-              <a:t>2. </a:t>
-            </a:r>
-            <a:r>
-              <a:rPr sz="3000" b="0">
-                <a:solidFill>
-                  <a:srgbClr val="1F2A44"/>
-                </a:solidFill>
-                <a:latin typeface="Nunito Sans"/>
-              </a:rPr>
-              <a:t>Pregunta siempre: ¿quién lo dice?, ¿cómo lo sabe?, ¿qué gana?</a:t>
-            </a:r>
-          </a:p>
-          <a:p>
-            <a:pPr>
-              <a:spcAft>
-                <a:spcPts val="1350"/>
-              </a:spcAft>
-            </a:pPr>
-            <a:r>
-              <a:rPr sz="3000" b="1">
-                <a:solidFill>
-                  <a:srgbClr val="E8793A"/>
-                </a:solidFill>
-                <a:latin typeface="Nunito Sans"/>
-              </a:rPr>
-              <a:t>3. </a:t>
-            </a:r>
-            <a:r>
-              <a:rPr sz="3000" b="0">
-                <a:solidFill>
-                  <a:srgbClr val="1F2A44"/>
-                </a:solidFill>
-                <a:latin typeface="Nunito Sans"/>
-              </a:rPr>
-              <a:t>Fiable no es infalible: es quien suele acertar y corrige sus errores.</a:t>
+                <a:latin typeface="Fredoka"/>
+              </a:rPr>
+              <a:t>Escríbelo tú primero, sin mirar</a:t>
+            </a:r>
+          </a:p>
+        </p:txBody>
+      </p:sp>
+      <p:sp>
+        <p:nvSpPr>
+          <p:cNvPr id="4" name="TextBox 3"/>
+          <p:cNvSpPr txBox="1"/>
+          <p:nvPr/>
+        </p:nvSpPr>
+        <p:spPr>
+          <a:xfrm>
+            <a:off x="640000" y="1800000"/>
+            <a:ext cx="10912000" cy="1500000"/>
+          </a:xfrm>
+          <a:prstGeom prst="rect">
+            <a:avLst/>
+          </a:prstGeom>
+          <a:noFill/>
+        </p:spPr>
+        <p:txBody>
+          <a:bodyPr wrap="square">
+            <a:spAutoFit/>
+          </a:bodyPr>
+          <a:lstStyle/>
+          <a:p>
+            <a:pPr>
+              <a:spcAft>
+                <a:spcPts val="1170"/>
+              </a:spcAft>
+            </a:pPr>
+            <a:r>
+              <a:rPr sz="2600" b="0">
+                <a:solidFill>
+                  <a:srgbClr val="4A5568"/>
+                </a:solidFill>
+                <a:latin typeface="Nunito Sans"/>
+              </a:rPr>
+              <a:t>Dos minutos. Después lo comparamos.</a:t>
             </a:r>
           </a:p>
         </p:txBody>
@@ -5217,7 +5116,7 @@
     <p:bg>
       <p:bgPr>
         <a:solidFill>
-          <a:srgbClr val="1F2A44"/>
+          <a:srgbClr val="FBF7EF"/>
         </a:solidFill>
         <a:effectLst/>
       </p:bgPr>
@@ -5259,11 +5158,11 @@
             <a:r>
               <a:rPr sz="1400" b="1">
                 <a:solidFill>
-                  <a:srgbClr val="F4B183"/>
-                </a:solidFill>
-                <a:latin typeface="Nunito Sans"/>
-              </a:rPr>
-              <a:t>VÍDEO</a:t>
+                  <a:srgbClr val="E8793A"/>
+                </a:solidFill>
+                <a:latin typeface="Nunito Sans"/>
+              </a:rPr>
+              <a:t>LO DE HOY EN TRES LÍNEAS</a:t>
             </a:r>
           </a:p>
         </p:txBody>
@@ -5276,8 +5175,8 @@
         </p:nvSpPr>
         <p:spPr>
           <a:xfrm>
-            <a:off x="640000" y="760000"/>
-            <a:ext cx="10912000" cy="800000"/>
+            <a:off x="640000" y="1300000"/>
+            <a:ext cx="10912000" cy="4800000"/>
           </a:xfrm>
           <a:prstGeom prst="rect">
             <a:avLst/>
@@ -5292,56 +5191,76 @@
           <a:p>
             <a:pPr>
               <a:spcAft>
-                <a:spcPts val="1620"/>
-              </a:spcAft>
-            </a:pPr>
-            <a:r>
-              <a:rPr sz="3600" b="1">
-                <a:solidFill>
-                  <a:srgbClr val="FBF7EF"/>
-                </a:solidFill>
-                <a:latin typeface="Fredoka"/>
-              </a:rPr>
-              <a:t>Cómo saber si una fuente de información es fiable</a:t>
-            </a:r>
-          </a:p>
-        </p:txBody>
-      </p:sp>
-      <p:sp>
-        <p:nvSpPr>
-          <p:cNvPr id="4" name="TextBox 3"/>
-          <p:cNvSpPr txBox="1"/>
-          <p:nvPr/>
-        </p:nvSpPr>
-        <p:spPr>
-          <a:xfrm>
-            <a:off x="640000" y="2200000"/>
-            <a:ext cx="10912000" cy="2000000"/>
-          </a:xfrm>
-          <a:prstGeom prst="rect">
-            <a:avLst/>
-          </a:prstGeom>
-          <a:noFill/>
-        </p:spPr>
-        <p:txBody>
-          <a:bodyPr wrap="square">
-            <a:spAutoFit/>
-          </a:bodyPr>
-          <a:lstStyle/>
-          <a:p>
-            <a:pPr>
-              <a:spcAft>
-                <a:spcPts val="1080"/>
-              </a:spcAft>
-            </a:pPr>
-            <a:r>
-              <a:rPr sz="2400" b="0">
-                <a:solidFill>
-                  <a:srgbClr val="C9D3E6"/>
-                </a:solidFill>
-                <a:latin typeface="Nunito Sans"/>
-              </a:rPr>
-              <a:t>Que oigan las mismas preguntas (quién, cómo lo sabe, qué gana) con otros ejemplos.</a:t>
+                <a:spcPts val="1350"/>
+              </a:spcAft>
+            </a:pPr>
+            <a:r>
+              <a:rPr sz="3000" b="1">
+                <a:solidFill>
+                  <a:srgbClr val="E8793A"/>
+                </a:solidFill>
+                <a:latin typeface="Nunito Sans"/>
+              </a:rPr>
+              <a:t>1. </a:t>
+            </a:r>
+            <a:r>
+              <a:rPr sz="3000" b="0">
+                <a:solidFill>
+                  <a:srgbClr val="1F2A44"/>
+                </a:solidFill>
+                <a:latin typeface="Nunito Sans"/>
+              </a:rPr>
+              <a:t>Creer es pensar que algo es verdad, y puede fallar.</a:t>
+            </a:r>
+          </a:p>
+          <a:p>
+            <a:pPr>
+              <a:spcAft>
+                <a:spcPts val="1350"/>
+              </a:spcAft>
+            </a:pPr>
+            <a:r>
+              <a:rPr sz="3000" b="1">
+                <a:solidFill>
+                  <a:srgbClr val="E8793A"/>
+                </a:solidFill>
+                <a:latin typeface="Nunito Sans"/>
+              </a:rPr>
+              <a:t>2. </a:t>
+            </a:r>
+            <a:r>
+              <a:rPr sz="3000" b="0">
+                <a:solidFill>
+                  <a:srgbClr val="1F2A44"/>
+                </a:solidFill>
+                <a:latin typeface="Nunito Sans"/>
+              </a:rPr>
+              <a:t>Solemos decir que saber es creer algo verdadero con buenas razones, aunque hay casos difíciles.</a:t>
+            </a:r>
+          </a:p>
+          <a:p>
+            <a:pPr>
+              <a:spcAft>
+                <a:spcPts val="1350"/>
+              </a:spcAft>
+            </a:pPr>
+            <a:r>
+              <a:rPr sz="3000" b="1">
+                <a:solidFill>
+                  <a:srgbClr val="E8793A"/>
+                </a:solidFill>
+                <a:latin typeface="Nunito Sans"/>
+              </a:rPr>
+              <a:t>3. </a:t>
+            </a:r>
+            <a:r>
+              <a:rPr sz="3000" b="0">
+                <a:solidFill>
+                  <a:srgbClr val="1F2A44"/>
+                </a:solidFill>
+                <a:latin typeface="Nunito Sans"/>
+              </a:rPr>
+              <a:t>Sentirse seguro es un sentimiento: me puedo sentir seguro y estar equivocado.</a:t>
             </a:r>
           </a:p>
         </p:txBody>
@@ -5406,6 +5325,149 @@
                 </a:solidFill>
                 <a:latin typeface="Nunito Sans"/>
               </a:rPr>
+              <a:t>VÍDEO</a:t>
+            </a:r>
+          </a:p>
+        </p:txBody>
+      </p:sp>
+      <p:sp>
+        <p:nvSpPr>
+          <p:cNvPr id="3" name="TextBox 2"/>
+          <p:cNvSpPr txBox="1"/>
+          <p:nvPr/>
+        </p:nvSpPr>
+        <p:spPr>
+          <a:xfrm>
+            <a:off x="640000" y="760000"/>
+            <a:ext cx="10912000" cy="800000"/>
+          </a:xfrm>
+          <a:prstGeom prst="rect">
+            <a:avLst/>
+          </a:prstGeom>
+          <a:noFill/>
+        </p:spPr>
+        <p:txBody>
+          <a:bodyPr wrap="square">
+            <a:spAutoFit/>
+          </a:bodyPr>
+          <a:lstStyle/>
+          <a:p>
+            <a:pPr>
+              <a:spcAft>
+                <a:spcPts val="1620"/>
+              </a:spcAft>
+            </a:pPr>
+            <a:r>
+              <a:rPr sz="3600" b="1">
+                <a:solidFill>
+                  <a:srgbClr val="FBF7EF"/>
+                </a:solidFill>
+                <a:latin typeface="Fredoka"/>
+              </a:rPr>
+              <a:t>Diferencia entre creer y saber (el conocimiento como creencia verdadera con buenas razones)</a:t>
+            </a:r>
+          </a:p>
+        </p:txBody>
+      </p:sp>
+      <p:sp>
+        <p:nvSpPr>
+          <p:cNvPr id="4" name="TextBox 3"/>
+          <p:cNvSpPr txBox="1"/>
+          <p:nvPr/>
+        </p:nvSpPr>
+        <p:spPr>
+          <a:xfrm>
+            <a:off x="640000" y="2200000"/>
+            <a:ext cx="10912000" cy="2000000"/>
+          </a:xfrm>
+          <a:prstGeom prst="rect">
+            <a:avLst/>
+          </a:prstGeom>
+          <a:noFill/>
+        </p:spPr>
+        <p:txBody>
+          <a:bodyPr wrap="square">
+            <a:spAutoFit/>
+          </a:bodyPr>
+          <a:lstStyle/>
+          <a:p>
+            <a:pPr>
+              <a:spcAft>
+                <a:spcPts val="1080"/>
+              </a:spcAft>
+            </a:pPr>
+            <a:r>
+              <a:rPr sz="2400" b="0">
+                <a:solidFill>
+                  <a:srgbClr val="C9D3E6"/>
+                </a:solidFill>
+                <a:latin typeface="Nunito Sans"/>
+              </a:rPr>
+              <a:t>Oír otra vez, con otras palabras, que saber necesita verdad y buenas razones, no solo seguridad.</a:t>
+            </a:r>
+          </a:p>
+        </p:txBody>
+      </p:sp>
+    </p:spTree>
+  </p:cSld>
+  <p:clrMapOvr>
+    <a:masterClrMapping/>
+  </p:clrMapOvr>
+</p:sld>
+</file>
+
+<file path=ppt/slides/slide18.xml><?xml version="1.0" encoding="utf-8"?>
+<p:sld xmlns:a="http://schemas.openxmlformats.org/drawingml/2006/main" xmlns:p="http://schemas.openxmlformats.org/presentationml/2006/main" xmlns:r="http://schemas.openxmlformats.org/officeDocument/2006/relationships">
+  <p:cSld>
+    <p:bg>
+      <p:bgPr>
+        <a:solidFill>
+          <a:srgbClr val="1F2A44"/>
+        </a:solidFill>
+        <a:effectLst/>
+      </p:bgPr>
+    </p:bg>
+    <p:spTree>
+      <p:nvGrpSpPr>
+        <p:cNvPr id="1" name=""/>
+        <p:cNvGrpSpPr/>
+        <p:nvPr/>
+      </p:nvGrpSpPr>
+      <p:grpSpPr/>
+      <p:sp>
+        <p:nvSpPr>
+          <p:cNvPr id="2" name="TextBox 1"/>
+          <p:cNvSpPr txBox="1"/>
+          <p:nvPr/>
+        </p:nvSpPr>
+        <p:spPr>
+          <a:xfrm>
+            <a:off x="640000" y="380000"/>
+            <a:ext cx="10912000" cy="420000"/>
+          </a:xfrm>
+          <a:prstGeom prst="rect">
+            <a:avLst/>
+          </a:prstGeom>
+          <a:noFill/>
+        </p:spPr>
+        <p:txBody>
+          <a:bodyPr wrap="square">
+            <a:spAutoFit/>
+          </a:bodyPr>
+          <a:lstStyle/>
+          <a:p>
+            <a:pPr>
+              <a:spcAft>
+                <a:spcPts val="630"/>
+              </a:spcAft>
+            </a:pPr>
+            <a:r>
+              <a:rPr sz="1400" b="1">
+                <a:solidFill>
+                  <a:srgbClr val="F4B183"/>
+                </a:solidFill>
+                <a:latin typeface="Nunito Sans"/>
+              </a:rPr>
               <a:t>AHORA, LA HOJA DEL DÍA</a:t>
             </a:r>
           </a:p>
@@ -5999,7 +6061,7 @@
                 </a:solidFill>
                 <a:latin typeface="Nunito Sans"/>
               </a:rPr>
-              <a:t>Antes de fiarme de un experto miro su campo, el ______, sus intereses y sus pruebas.  (sesión 30)</a:t>
+              <a:t>La generalización apresurada pasa de pocos casos a «______».  (sesión 30)</a:t>
             </a:r>
           </a:p>
           <a:p>
@@ -6024,7 +6086,7 @@
                 </a:solidFill>
                 <a:latin typeface="Nunito Sans"/>
               </a:rPr>
-              <a:t>En los experimentos de la unidad 5, el de las líneas estudió la ______; el de las descargas, la obediencia.  (sesión 30)</a:t>
+              <a:t>La causa falsa confunde «después de» con «por ______ de».  (sesión 30)</a:t>
             </a:r>
           </a:p>
           <a:p>
@@ -6049,7 +6111,7 @@
                 </a:solidFill>
                 <a:latin typeface="Nunito Sans"/>
               </a:rPr>
-              <a:t>Pregunta que desmonta la generalización apresurada: ¿cuántos ______ has mirado?  (sesión 19)</a:t>
+              <a:t>En una falacia, las razones no sostienen la ______.  (sesión 19)</a:t>
             </a:r>
           </a:p>
         </p:txBody>
@@ -6201,7 +6263,7 @@
                 </a:solidFill>
                 <a:latin typeface="Nunito Sans"/>
               </a:rPr>
-              <a:t>Antes de fiarme de un experto miro su campo, el </a:t>
+              <a:t>La generalización apresurada pasa de pocos casos a «</a:t>
             </a:r>
             <a:r>
               <a:rPr sz="2600" b="1">
@@ -6210,7 +6272,7 @@
                 </a:solidFill>
                 <a:latin typeface="Nunito Sans"/>
               </a:rPr>
-              <a:t>consenso</a:t>
+              <a:t>todos</a:t>
             </a:r>
             <a:r>
               <a:rPr sz="2600" b="0">
@@ -6219,7 +6281,7 @@
                 </a:solidFill>
                 <a:latin typeface="Nunito Sans"/>
               </a:rPr>
-              <a:t>, sus intereses y sus pruebas.  (sesión 30)</a:t>
+              <a:t>».  (sesión 30)</a:t>
             </a:r>
           </a:p>
           <a:p>
@@ -6244,7 +6306,7 @@
                 </a:solidFill>
                 <a:latin typeface="Nunito Sans"/>
               </a:rPr>
-              <a:t>En los experimentos de la unidad 5, el de las líneas estudió la </a:t>
+              <a:t>La causa falsa confunde «después de» con «por </a:t>
             </a:r>
             <a:r>
               <a:rPr sz="2600" b="1">
@@ -6253,7 +6315,7 @@
                 </a:solidFill>
                 <a:latin typeface="Nunito Sans"/>
               </a:rPr>
-              <a:t>conformidad</a:t>
+              <a:t>culpa</a:t>
             </a:r>
             <a:r>
               <a:rPr sz="2600" b="0">
@@ -6262,7 +6324,7 @@
                 </a:solidFill>
                 <a:latin typeface="Nunito Sans"/>
               </a:rPr>
-              <a:t>; el de las descargas, la obediencia.  (sesión 30)</a:t>
+              <a:t> de».  (sesión 30)</a:t>
             </a:r>
           </a:p>
           <a:p>
@@ -6287,7 +6349,7 @@
                 </a:solidFill>
                 <a:latin typeface="Nunito Sans"/>
               </a:rPr>
-              <a:t>Pregunta que desmonta la generalización apresurada: ¿cuántos </a:t>
+              <a:t>En una falacia, las razones no sostienen la </a:t>
             </a:r>
             <a:r>
               <a:rPr sz="2600" b="1">
@@ -6296,7 +6358,7 @@
                 </a:solidFill>
                 <a:latin typeface="Nunito Sans"/>
               </a:rPr>
-              <a:t>casos</a:t>
+              <a:t>conclusión</a:t>
             </a:r>
             <a:r>
               <a:rPr sz="2600" b="0">
@@ -6305,7 +6367,7 @@
                 </a:solidFill>
                 <a:latin typeface="Nunito Sans"/>
               </a:rPr>
-              <a:t> has mirado?  (sesión 19)</a:t>
+              <a:t>.  (sesión 19)</a:t>
             </a:r>
           </a:p>
         </p:txBody>
@@ -6452,7 +6514,7 @@
                 </a:solidFill>
                 <a:latin typeface="Nunito Sans"/>
               </a:rPr>
-              <a:t>Tres mensajes dicen que mañana cierra el metro: uno de un amigo, otro de una cuenta sin nombre y otro de la web oficial del metro.</a:t>
+              <a:t>Un chico está segurísimo de que dejó las llaves en la mochila. Las busca… y no están.</a:t>
             </a:r>
           </a:p>
         </p:txBody>
@@ -6491,7 +6553,7 @@
                 </a:solidFill>
                 <a:latin typeface="Nunito Sans"/>
               </a:rPr>
-              <a:t>¿A cuál harías más caso? ¿Por qué?</a:t>
+              <a:t>¿Ese chico sabía dónde estaban las llaves, o solo lo creía?</a:t>
             </a:r>
           </a:p>
         </p:txBody>
@@ -6595,7 +6657,7 @@
                 </a:solidFill>
                 <a:latin typeface="Fredoka"/>
               </a:rPr>
-              <a:t>Qué es una fuente</a:t>
+              <a:t>Tres palabras que se confunden</a:t>
             </a:r>
           </a:p>
         </p:txBody>
@@ -6660,7 +6722,7 @@
                 </a:solidFill>
                 <a:latin typeface="Nunito Sans"/>
               </a:rPr>
-              <a:t>BLOQUE 1 · QUÉ ES UNA FUENTE</a:t>
+              <a:t>BLOQUE 1 · TRES PALABRAS QUE SE CONFUNDEN</a:t>
             </a:r>
           </a:p>
         </p:txBody>
@@ -6699,7 +6761,7 @@
                 </a:solidFill>
                 <a:latin typeface="Fredoka"/>
               </a:rPr>
-              <a:t>Fuente</a:t>
+              <a:t>Creer</a:t>
             </a:r>
           </a:p>
         </p:txBody>
@@ -6781,7 +6843,25 @@
                 </a:solidFill>
                 <a:latin typeface="Nunito Sans"/>
               </a:rPr>
-              <a:t>Una fuente es de donde sale una información: una persona, un medio, una web, un libro.</a:t>
+              <a:t>Creer es pensar que algo es </a:t>
+            </a:r>
+            <a:r>
+              <a:rPr sz="2800" b="1">
+                <a:solidFill>
+                  <a:srgbClr val="1F2A44"/>
+                </a:solidFill>
+                <a:latin typeface="Nunito Sans"/>
+              </a:rPr>
+              <a:t>verdad</a:t>
+            </a:r>
+            <a:r>
+              <a:rPr sz="2800" b="1">
+                <a:solidFill>
+                  <a:srgbClr val="1F2A44"/>
+                </a:solidFill>
+                <a:latin typeface="Nunito Sans"/>
+              </a:rPr>
+              <a:t>. Lo que creo puede ser verdad… o no.</a:t>
             </a:r>
           </a:p>
         </p:txBody>
@@ -6823,13 +6903,54 @@
               <a:t>• </a:t>
             </a:r>
             <a:r>
+              <a:rPr sz="2800" b="0">
+                <a:solidFill>
+                  <a:srgbClr val="1F2A44"/>
+                </a:solidFill>
+                <a:latin typeface="Nunito Sans"/>
+              </a:rPr>
+              <a:t>«Creo que mañana lloverá»</a:t>
+            </a:r>
+          </a:p>
+          <a:p>
+            <a:pPr>
+              <a:spcAft>
+                <a:spcPts val="1260"/>
+              </a:spcAft>
+            </a:pPr>
+            <a:r>
               <a:rPr sz="2800" b="1">
                 <a:solidFill>
+                  <a:srgbClr val="E8793A"/>
+                </a:solidFill>
+                <a:latin typeface="Nunito Sans"/>
+              </a:rPr>
+              <a:t>• </a:t>
+            </a:r>
+            <a:r>
+              <a:rPr sz="2800" b="0">
+                <a:solidFill>
                   <a:srgbClr val="1F2A44"/>
                 </a:solidFill>
                 <a:latin typeface="Nunito Sans"/>
               </a:rPr>
-              <a:t>Fuente original:</a:t>
+              <a:t>Todos creemos muchas cosas sin comprobarlas</a:t>
+            </a:r>
+          </a:p>
+          <a:p>
+            <a:pPr>
+              <a:spcAft>
+                <a:spcPts val="1260"/>
+              </a:spcAft>
+            </a:pPr>
+            <a:r>
+              <a:rPr sz="2800" b="1">
+                <a:solidFill>
+                  <a:srgbClr val="E8793A"/>
+                </a:solidFill>
+                <a:latin typeface="Nunito Sans"/>
+              </a:rPr>
+              <a:t>• </a:t>
             </a:r>
             <a:r>
               <a:rPr sz="2800" b="0">
@@ -6838,66 +6959,7 @@
                 </a:solidFill>
                 <a:latin typeface="Nunito Sans"/>
               </a:rPr>
-              <a:t> quien lo vio, lo midió o lo decidió</a:t>
-            </a:r>
-          </a:p>
-          <a:p>
-            <a:pPr>
-              <a:spcAft>
-                <a:spcPts val="1260"/>
-              </a:spcAft>
-            </a:pPr>
-            <a:r>
-              <a:rPr sz="2800" b="1">
-                <a:solidFill>
-                  <a:srgbClr val="E8793A"/>
-                </a:solidFill>
-                <a:latin typeface="Nunito Sans"/>
-              </a:rPr>
-              <a:t>• </a:t>
-            </a:r>
-            <a:r>
-              <a:rPr sz="2800" b="1">
-                <a:solidFill>
-                  <a:srgbClr val="1F2A44"/>
-                </a:solidFill>
-                <a:latin typeface="Nunito Sans"/>
-              </a:rPr>
-              <a:t>De segunda mano:</a:t>
-            </a:r>
-            <a:r>
-              <a:rPr sz="2800" b="0">
-                <a:solidFill>
-                  <a:srgbClr val="1F2A44"/>
-                </a:solidFill>
-                <a:latin typeface="Nunito Sans"/>
-              </a:rPr>
-              <a:t> quien lo cuenta después</a:t>
-            </a:r>
-          </a:p>
-          <a:p>
-            <a:pPr>
-              <a:spcAft>
-                <a:spcPts val="1260"/>
-              </a:spcAft>
-            </a:pPr>
-            <a:r>
-              <a:rPr sz="2800" b="1">
-                <a:solidFill>
-                  <a:srgbClr val="E8793A"/>
-                </a:solidFill>
-                <a:latin typeface="Nunito Sans"/>
-              </a:rPr>
-              <a:t>• </a:t>
-            </a:r>
-            <a:r>
-              <a:rPr sz="2800" b="0">
-                <a:solidFill>
-                  <a:srgbClr val="1F2A44"/>
-                </a:solidFill>
-                <a:latin typeface="Nunito Sans"/>
-              </a:rPr>
-              <a:t>Cuanto más lejos del original, más fácil que cambie</a:t>
+              <a:t>Creer no es malo: lo malo es no revisar nunca</a:t>
             </a:r>
           </a:p>
         </p:txBody>
@@ -6962,7 +7024,7 @@
                 </a:solidFill>
                 <a:latin typeface="Nunito Sans"/>
               </a:rPr>
-              <a:t>BLOQUE 1 · QUÉ ES UNA FUENTE</a:t>
+              <a:t>BLOQUE 1 · TRES PALABRAS QUE SE CONFUNDEN</a:t>
             </a:r>
           </a:p>
         </p:txBody>
@@ -7001,221 +7063,227 @@
                 </a:solidFill>
                 <a:latin typeface="Fredoka"/>
               </a:rPr>
-              <a:t>Tres preguntas a una fuente</a:t>
-            </a:r>
-          </a:p>
-        </p:txBody>
-      </p:sp>
-      <p:graphicFrame>
-        <p:nvGraphicFramePr>
-          <p:cNvPr id="4" name="Table 3"/>
-          <p:cNvGraphicFramePr>
-            <a:graphicFrameLocks noGrp="1"/>
-          </p:cNvGraphicFramePr>
+              <a:t>Saber</a:t>
+            </a:r>
+          </a:p>
+        </p:txBody>
+      </p:sp>
+      <p:sp>
+        <p:nvSpPr>
+          <p:cNvPr id="4" name="Rectangle 3"/>
+          <p:cNvSpPr/>
           <p:nvPr/>
-        </p:nvGraphicFramePr>
-        <p:xfrm>
-          <a:off x="640000" y="1700000"/>
-          <a:ext cx="10912000" cy="2400000"/>
-        </p:xfrm>
-        <a:graphic>
-          <a:graphicData uri="http://schemas.openxmlformats.org/drawingml/2006/table">
-            <a:tbl>
-              <a:tblPr firstRow="1" bandRow="1">
-                <a:tableStyleId>{5C22544A-7EE6-4342-B048-85BDC9FD1C3A}</a:tableStyleId>
-              </a:tblPr>
-              <a:tblGrid>
-                <a:gridCol w="5456000"/>
-                <a:gridCol w="5456000"/>
-              </a:tblGrid>
-              <a:tr h="600000">
-                <a:tc>
-                  <a:txBody>
-                    <a:bodyPr/>
-                    <a:lstStyle/>
-                    <a:p>
-                      <a:r>
-                        <a:rPr sz="2000" b="1">
-                          <a:solidFill>
-                            <a:srgbClr val="FBF7EF"/>
-                          </a:solidFill>
-                          <a:latin typeface="Fredoka"/>
-                        </a:rPr>
-                        <a:t>Pregunta</a:t>
-                      </a:r>
-                    </a:p>
-                  </a:txBody>
-                  <a:tcPr>
-                    <a:solidFill>
-                      <a:srgbClr val="1F2A44"/>
-                    </a:solidFill>
-                  </a:tcPr>
-                </a:tc>
-                <a:tc>
-                  <a:txBody>
-                    <a:bodyPr/>
-                    <a:lstStyle/>
-                    <a:p>
-                      <a:r>
-                        <a:rPr sz="2000" b="1">
-                          <a:solidFill>
-                            <a:srgbClr val="FBF7EF"/>
-                          </a:solidFill>
-                          <a:latin typeface="Fredoka"/>
-                        </a:rPr>
-                        <a:t>Qué miro</a:t>
-                      </a:r>
-                    </a:p>
-                  </a:txBody>
-                  <a:tcPr>
-                    <a:solidFill>
-                      <a:srgbClr val="1F2A44"/>
-                    </a:solidFill>
-                  </a:tcPr>
-                </a:tc>
-              </a:tr>
-              <a:tr h="600000">
-                <a:tc>
-                  <a:txBody>
-                    <a:bodyPr/>
-                    <a:lstStyle/>
-                    <a:p>
-                      <a:r>
-                        <a:rPr sz="2000" b="1">
-                          <a:solidFill>
-                            <a:srgbClr val="1F2A44"/>
-                          </a:solidFill>
-                          <a:latin typeface="Nunito Sans"/>
-                        </a:rPr>
-                        <a:t>¿Quién lo dice?</a:t>
-                      </a:r>
-                    </a:p>
-                  </a:txBody>
-                  <a:tcPr>
-                    <a:solidFill>
-                      <a:srgbClr val="FFFFFF"/>
-                    </a:solidFill>
-                  </a:tcPr>
-                </a:tc>
-                <a:tc>
-                  <a:txBody>
-                    <a:bodyPr/>
-                    <a:lstStyle/>
-                    <a:p>
-                      <a:r>
-                        <a:rPr sz="2000" b="0">
-                          <a:solidFill>
-                            <a:srgbClr val="1F2A44"/>
-                          </a:solidFill>
-                          <a:latin typeface="Nunito Sans"/>
-                        </a:rPr>
-                        <a:t>¿Tiene nombre? ¿Sabe del tema?</a:t>
-                      </a:r>
-                    </a:p>
-                  </a:txBody>
-                  <a:tcPr>
-                    <a:solidFill>
-                      <a:srgbClr val="FFFFFF"/>
-                    </a:solidFill>
-                  </a:tcPr>
-                </a:tc>
-              </a:tr>
-              <a:tr h="600000">
-                <a:tc>
-                  <a:txBody>
-                    <a:bodyPr/>
-                    <a:lstStyle/>
-                    <a:p>
-                      <a:r>
-                        <a:rPr sz="2000" b="1">
-                          <a:solidFill>
-                            <a:srgbClr val="1F2A44"/>
-                          </a:solidFill>
-                          <a:latin typeface="Nunito Sans"/>
-                        </a:rPr>
-                        <a:t>¿Cómo lo sabe?</a:t>
-                      </a:r>
-                    </a:p>
-                  </a:txBody>
-                  <a:tcPr>
-                    <a:solidFill>
-                      <a:srgbClr val="EAF0F7"/>
-                    </a:solidFill>
-                  </a:tcPr>
-                </a:tc>
-                <a:tc>
-                  <a:txBody>
-                    <a:bodyPr/>
-                    <a:lstStyle/>
-                    <a:p>
-                      <a:r>
-                        <a:rPr sz="2000" b="0">
-                          <a:solidFill>
-                            <a:srgbClr val="1F2A44"/>
-                          </a:solidFill>
-                          <a:latin typeface="Nunito Sans"/>
-                        </a:rPr>
-                        <a:t>¿Lo vio, lo midió o lo copió?</a:t>
-                      </a:r>
-                    </a:p>
-                  </a:txBody>
-                  <a:tcPr>
-                    <a:solidFill>
-                      <a:srgbClr val="EAF0F7"/>
-                    </a:solidFill>
-                  </a:tcPr>
-                </a:tc>
-              </a:tr>
-              <a:tr h="600000">
-                <a:tc>
-                  <a:txBody>
-                    <a:bodyPr/>
-                    <a:lstStyle/>
-                    <a:p>
-                      <a:r>
-                        <a:rPr sz="2000" b="1">
-                          <a:solidFill>
-                            <a:srgbClr val="1F2A44"/>
-                          </a:solidFill>
-                          <a:latin typeface="Nunito Sans"/>
-                        </a:rPr>
-                        <a:t>¿Qué gana?</a:t>
-                      </a:r>
-                    </a:p>
-                  </a:txBody>
-                  <a:tcPr>
-                    <a:solidFill>
-                      <a:srgbClr val="FFFFFF"/>
-                    </a:solidFill>
-                  </a:tcPr>
-                </a:tc>
-                <a:tc>
-                  <a:txBody>
-                    <a:bodyPr/>
-                    <a:lstStyle/>
-                    <a:p>
-                      <a:r>
-                        <a:rPr sz="2000" b="0">
-                          <a:solidFill>
-                            <a:srgbClr val="1F2A44"/>
-                          </a:solidFill>
-                          <a:latin typeface="Nunito Sans"/>
-                        </a:rPr>
-                        <a:t>¿Dinero, visitas, votos, fama?</a:t>
-                      </a:r>
-                    </a:p>
-                  </a:txBody>
-                  <a:tcPr>
-                    <a:solidFill>
-                      <a:srgbClr val="FFFFFF"/>
-                    </a:solidFill>
-                  </a:tcPr>
-                </a:tc>
-              </a:tr>
-            </a:tbl>
-          </a:graphicData>
-        </a:graphic>
-      </p:graphicFrame>
+        </p:nvSpPr>
+        <p:spPr>
+          <a:xfrm>
+            <a:off x="640000" y="1650000"/>
+            <a:ext cx="10912000" cy="1150000"/>
+          </a:xfrm>
+          <a:prstGeom prst="rect">
+            <a:avLst/>
+          </a:prstGeom>
+          <a:solidFill>
+            <a:srgbClr val="EAF0F7"/>
+          </a:solidFill>
+          <a:ln>
+            <a:noFill/>
+          </a:ln>
+        </p:spPr>
+        <p:style>
+          <a:lnRef idx="1">
+            <a:schemeClr val="accent1"/>
+          </a:lnRef>
+          <a:fillRef idx="3">
+            <a:schemeClr val="accent1"/>
+          </a:fillRef>
+          <a:effectRef idx="2">
+            <a:schemeClr val="accent1"/>
+          </a:effectRef>
+          <a:fontRef idx="minor">
+            <a:schemeClr val="lt1"/>
+          </a:fontRef>
+        </p:style>
+        <p:txBody>
+          <a:bodyPr rtlCol="0" anchor="ctr"/>
+          <a:lstStyle/>
+          <a:p>
+            <a:pPr algn="ctr"/>
+          </a:p>
+        </p:txBody>
+      </p:sp>
+      <p:sp>
+        <p:nvSpPr>
+          <p:cNvPr id="5" name="TextBox 4"/>
+          <p:cNvSpPr txBox="1"/>
+          <p:nvPr/>
+        </p:nvSpPr>
+        <p:spPr>
+          <a:xfrm>
+            <a:off x="840000" y="1730000"/>
+            <a:ext cx="10512000" cy="1000000"/>
+          </a:xfrm>
+          <a:prstGeom prst="rect">
+            <a:avLst/>
+          </a:prstGeom>
+          <a:noFill/>
+        </p:spPr>
+        <p:txBody>
+          <a:bodyPr wrap="square" anchor="ctr">
+            <a:spAutoFit/>
+          </a:bodyPr>
+          <a:lstStyle/>
+          <a:p>
+            <a:pPr>
+              <a:spcAft>
+                <a:spcPts val="1260"/>
+              </a:spcAft>
+            </a:pPr>
+            <a:r>
+              <a:rPr sz="2800" b="1">
+                <a:solidFill>
+                  <a:srgbClr val="1F2A44"/>
+                </a:solidFill>
+                <a:latin typeface="Nunito Sans"/>
+              </a:rPr>
+              <a:t>Solemos decir que alguien </a:t>
+            </a:r>
+            <a:r>
+              <a:rPr sz="2800" b="1">
+                <a:solidFill>
+                  <a:srgbClr val="1F2A44"/>
+                </a:solidFill>
+                <a:latin typeface="Nunito Sans"/>
+              </a:rPr>
+              <a:t>sabe</a:t>
+            </a:r>
+            <a:r>
+              <a:rPr sz="2800" b="1">
+                <a:solidFill>
+                  <a:srgbClr val="1F2A44"/>
+                </a:solidFill>
+                <a:latin typeface="Nunito Sans"/>
+              </a:rPr>
+              <a:t> algo cuando lo cree, es verdad y tiene </a:t>
+            </a:r>
+            <a:r>
+              <a:rPr sz="2800" b="1">
+                <a:solidFill>
+                  <a:srgbClr val="1F2A44"/>
+                </a:solidFill>
+                <a:latin typeface="Nunito Sans"/>
+              </a:rPr>
+              <a:t>buenas razones</a:t>
+            </a:r>
+            <a:r>
+              <a:rPr sz="2800" b="1">
+                <a:solidFill>
+                  <a:srgbClr val="1F2A44"/>
+                </a:solidFill>
+                <a:latin typeface="Nunito Sans"/>
+              </a:rPr>
+              <a:t>.</a:t>
+            </a:r>
+          </a:p>
+        </p:txBody>
+      </p:sp>
+      <p:sp>
+        <p:nvSpPr>
+          <p:cNvPr id="6" name="TextBox 5"/>
+          <p:cNvSpPr txBox="1"/>
+          <p:nvPr/>
+        </p:nvSpPr>
+        <p:spPr>
+          <a:xfrm>
+            <a:off x="640000" y="3000000"/>
+            <a:ext cx="10912000" cy="3458000"/>
+          </a:xfrm>
+          <a:prstGeom prst="rect">
+            <a:avLst/>
+          </a:prstGeom>
+          <a:noFill/>
+        </p:spPr>
+        <p:txBody>
+          <a:bodyPr wrap="square">
+            <a:spAutoFit/>
+          </a:bodyPr>
+          <a:lstStyle/>
+          <a:p>
+            <a:pPr>
+              <a:spcAft>
+                <a:spcPts val="1260"/>
+              </a:spcAft>
+            </a:pPr>
+            <a:r>
+              <a:rPr sz="2800" b="1">
+                <a:solidFill>
+                  <a:srgbClr val="E8793A"/>
+                </a:solidFill>
+                <a:latin typeface="Nunito Sans"/>
+              </a:rPr>
+              <a:t>• </a:t>
+            </a:r>
+            <a:r>
+              <a:rPr sz="2800" b="0">
+                <a:solidFill>
+                  <a:srgbClr val="1F2A44"/>
+                </a:solidFill>
+                <a:latin typeface="Nunito Sans"/>
+              </a:rPr>
+              <a:t>Si era falso, no lo sabía: solo lo creía</a:t>
+            </a:r>
+          </a:p>
+          <a:p>
+            <a:pPr>
+              <a:spcAft>
+                <a:spcPts val="1260"/>
+              </a:spcAft>
+            </a:pPr>
+            <a:r>
+              <a:rPr sz="2800" b="1">
+                <a:solidFill>
+                  <a:srgbClr val="E8793A"/>
+                </a:solidFill>
+                <a:latin typeface="Nunito Sans"/>
+              </a:rPr>
+              <a:t>• </a:t>
+            </a:r>
+            <a:r>
+              <a:rPr sz="2800" b="0">
+                <a:solidFill>
+                  <a:srgbClr val="1F2A44"/>
+                </a:solidFill>
+                <a:latin typeface="Nunito Sans"/>
+              </a:rPr>
+              <a:t>Si acierto por suerte, tampoco lo sé</a:t>
+            </a:r>
+          </a:p>
+          <a:p>
+            <a:pPr>
+              <a:spcAft>
+                <a:spcPts val="1260"/>
+              </a:spcAft>
+            </a:pPr>
+            <a:r>
+              <a:rPr sz="2800" b="1">
+                <a:solidFill>
+                  <a:srgbClr val="E8793A"/>
+                </a:solidFill>
+                <a:latin typeface="Nunito Sans"/>
+              </a:rPr>
+              <a:t>• </a:t>
+            </a:r>
+            <a:r>
+              <a:rPr sz="2800" b="0">
+                <a:solidFill>
+                  <a:srgbClr val="1F2A44"/>
+                </a:solidFill>
+                <a:latin typeface="Nunito Sans"/>
+              </a:rPr>
+              <a:t>Los filósofos llevan siglos discutiendo esta definición</a:t>
+            </a:r>
+          </a:p>
+        </p:txBody>
+      </p:sp>
     </p:spTree>
   </p:cSld>
   <p:clrMapOvr>
@@ -7276,7 +7344,7 @@
                 </a:solidFill>
                 <a:latin typeface="Nunito Sans"/>
               </a:rPr>
-              <a:t>BLOQUE 1 · QUÉ ES UNA FUENTE</a:t>
+              <a:t>BLOQUE 1 · TRES PALABRAS QUE SE CONFUNDEN</a:t>
             </a:r>
           </a:p>
         </p:txBody>
@@ -7315,7 +7383,7 @@
                 </a:solidFill>
                 <a:latin typeface="Fredoka"/>
               </a:rPr>
-              <a:t>Señales de una fuente (pistas, no pruebas)</a:t>
+              <a:t>Estar seguro</a:t>
             </a:r>
           </a:p>
         </p:txBody>
@@ -7329,13 +7397,13 @@
         <p:spPr>
           <a:xfrm>
             <a:off x="640000" y="1650000"/>
-            <a:ext cx="5306000" cy="4400000"/>
+            <a:ext cx="10912000" cy="1150000"/>
           </a:xfrm>
           <a:prstGeom prst="rect">
             <a:avLst/>
           </a:prstGeom>
           <a:solidFill>
-            <a:srgbClr val="FBE3D2"/>
+            <a:srgbClr val="EAF0F7"/>
           </a:solidFill>
           <a:ln>
             <a:noFill/>
@@ -7371,8 +7439,8 @@
         </p:nvSpPr>
         <p:spPr>
           <a:xfrm>
-            <a:off x="840000" y="1750000"/>
-            <a:ext cx="4906000" cy="600000"/>
+            <a:off x="840000" y="1730000"/>
+            <a:ext cx="10512000" cy="1000000"/>
           </a:xfrm>
           <a:prstGeom prst="rect">
             <a:avLst/>
@@ -7380,7 +7448,7 @@
           <a:noFill/>
         </p:spPr>
         <p:txBody>
-          <a:bodyPr wrap="square">
+          <a:bodyPr wrap="square" anchor="ctr">
             <a:spAutoFit/>
           </a:bodyPr>
           <a:lstStyle/>
@@ -7393,11 +7461,20 @@
             <a:r>
               <a:rPr sz="2800" b="1">
                 <a:solidFill>
-                  <a:srgbClr val="C2531C"/>
-                </a:solidFill>
-                <a:latin typeface="Nunito Sans"/>
-              </a:rPr>
-              <a:t>Señales de alerta</a:t>
+                  <a:srgbClr val="1F2A44"/>
+                </a:solidFill>
+                <a:latin typeface="Nunito Sans"/>
+              </a:rPr>
+              <a:t>Sentirse</a:t>
+            </a:r>
+            <a:r>
+              <a:rPr sz="2800" b="1">
+                <a:solidFill>
+                  <a:srgbClr val="1F2A44"/>
+                </a:solidFill>
+                <a:latin typeface="Nunito Sans"/>
+              </a:rPr>
+              <a:t> seguro es un sentimiento: la sensación de que no me equivoco.</a:t>
             </a:r>
           </a:p>
         </p:txBody>
@@ -7410,8 +7487,8 @@
         </p:nvSpPr>
         <p:spPr>
           <a:xfrm>
-            <a:off x="840000" y="2400000"/>
-            <a:ext cx="4906000" cy="3500000"/>
+            <a:off x="640000" y="3000000"/>
+            <a:ext cx="10912000" cy="3458000"/>
           </a:xfrm>
           <a:prstGeom prst="rect">
             <a:avLst/>
@@ -7426,11 +7503,11 @@
           <a:p>
             <a:pPr>
               <a:spcAft>
-                <a:spcPts val="1170"/>
-              </a:spcAft>
-            </a:pPr>
-            <a:r>
-              <a:rPr sz="2600" b="1">
+                <a:spcPts val="1260"/>
+              </a:spcAft>
+            </a:pPr>
+            <a:r>
+              <a:rPr sz="2800" b="1">
                 <a:solidFill>
                   <a:srgbClr val="E8793A"/>
                 </a:solidFill>
@@ -7439,23 +7516,23 @@
               <a:t>• </a:t>
             </a:r>
             <a:r>
-              <a:rPr sz="2600" b="0">
+              <a:rPr sz="2800" b="0">
                 <a:solidFill>
                   <a:srgbClr val="1F2A44"/>
                 </a:solidFill>
                 <a:latin typeface="Nunito Sans"/>
               </a:rPr>
-              <a:t>Sin autor ni fecha</a:t>
-            </a:r>
-          </a:p>
-          <a:p>
-            <a:pPr>
-              <a:spcAft>
-                <a:spcPts val="1170"/>
-              </a:spcAft>
-            </a:pPr>
-            <a:r>
-              <a:rPr sz="2600" b="1">
+              <a:t>Me puedo sentir seguro y estar equivocado</a:t>
+            </a:r>
+          </a:p>
+          <a:p>
+            <a:pPr>
+              <a:spcAft>
+                <a:spcPts val="1260"/>
+              </a:spcAft>
+            </a:pPr>
+            <a:r>
+              <a:rPr sz="2800" b="1">
                 <a:solidFill>
                   <a:srgbClr val="E8793A"/>
                 </a:solidFill>
@@ -7464,23 +7541,23 @@
               <a:t>• </a:t>
             </a:r>
             <a:r>
-              <a:rPr sz="2600" b="0">
+              <a:rPr sz="2800" b="0">
                 <a:solidFill>
                   <a:srgbClr val="1F2A44"/>
                 </a:solidFill>
                 <a:latin typeface="Nunito Sans"/>
               </a:rPr>
-              <a:t>No dice de dónde saca los datos</a:t>
-            </a:r>
-          </a:p>
-          <a:p>
-            <a:pPr>
-              <a:spcAft>
-                <a:spcPts val="1170"/>
-              </a:spcAft>
-            </a:pPr>
-            <a:r>
-              <a:rPr sz="2600" b="1">
+              <a:t>El sentimiento, solo, no es una razón</a:t>
+            </a:r>
+          </a:p>
+          <a:p>
+            <a:pPr>
+              <a:spcAft>
+                <a:spcPts val="1260"/>
+              </a:spcAft>
+            </a:pPr>
+            <a:r>
+              <a:rPr sz="2800" b="1">
                 <a:solidFill>
                   <a:srgbClr val="E8793A"/>
                 </a:solidFill>
@@ -7489,218 +7566,31 @@
               <a:t>• </a:t>
             </a:r>
             <a:r>
-              <a:rPr sz="2600" b="0">
+              <a:rPr sz="2800" b="0">
                 <a:solidFill>
                   <a:srgbClr val="1F2A44"/>
                 </a:solidFill>
                 <a:latin typeface="Nunito Sans"/>
               </a:rPr>
-              <a:t>Quiere que compres, votes o compartas ya</a:t>
-            </a:r>
-          </a:p>
-        </p:txBody>
-      </p:sp>
-      <p:sp>
-        <p:nvSpPr>
-          <p:cNvPr id="7" name="Rectangle 6"/>
-          <p:cNvSpPr/>
-          <p:nvPr/>
-        </p:nvSpPr>
-        <p:spPr>
-          <a:xfrm>
-            <a:off x="6246000" y="1650000"/>
-            <a:ext cx="5306000" cy="4400000"/>
-          </a:xfrm>
-          <a:prstGeom prst="rect">
-            <a:avLst/>
-          </a:prstGeom>
-          <a:solidFill>
-            <a:srgbClr val="EAF0F7"/>
-          </a:solidFill>
-          <a:ln>
-            <a:noFill/>
-          </a:ln>
-        </p:spPr>
-        <p:style>
-          <a:lnRef idx="1">
-            <a:schemeClr val="accent1"/>
-          </a:lnRef>
-          <a:fillRef idx="3">
-            <a:schemeClr val="accent1"/>
-          </a:fillRef>
-          <a:effectRef idx="2">
-            <a:schemeClr val="accent1"/>
-          </a:effectRef>
-          <a:fontRef idx="minor">
-            <a:schemeClr val="lt1"/>
-          </a:fontRef>
-        </p:style>
-        <p:txBody>
-          <a:bodyPr rtlCol="0" anchor="ctr"/>
-          <a:lstStyle/>
-          <a:p>
-            <a:pPr algn="ctr"/>
-          </a:p>
-        </p:txBody>
-      </p:sp>
-      <p:sp>
-        <p:nvSpPr>
-          <p:cNvPr id="8" name="TextBox 7"/>
-          <p:cNvSpPr txBox="1"/>
-          <p:nvPr/>
-        </p:nvSpPr>
-        <p:spPr>
-          <a:xfrm>
-            <a:off x="6446000" y="1750000"/>
-            <a:ext cx="4906000" cy="600000"/>
-          </a:xfrm>
-          <a:prstGeom prst="rect">
-            <a:avLst/>
-          </a:prstGeom>
-          <a:noFill/>
-        </p:spPr>
-        <p:txBody>
-          <a:bodyPr wrap="square">
-            <a:spAutoFit/>
-          </a:bodyPr>
-          <a:lstStyle/>
-          <a:p>
-            <a:pPr>
-              <a:spcAft>
-                <a:spcPts val="1260"/>
-              </a:spcAft>
-            </a:pPr>
+              <a:t>Estar seguro </a:t>
+            </a:r>
             <a:r>
               <a:rPr sz="2800" b="1">
                 <a:solidFill>
-                  <a:srgbClr val="2F6FB5"/>
-                </a:solidFill>
-                <a:latin typeface="Nunito Sans"/>
-              </a:rPr>
-              <a:t>Señales a favor</a:t>
-            </a:r>
-          </a:p>
-        </p:txBody>
-      </p:sp>
-      <p:sp>
-        <p:nvSpPr>
-          <p:cNvPr id="9" name="TextBox 8"/>
-          <p:cNvSpPr txBox="1"/>
-          <p:nvPr/>
-        </p:nvSpPr>
-        <p:spPr>
-          <a:xfrm>
-            <a:off x="6446000" y="2400000"/>
-            <a:ext cx="4906000" cy="3500000"/>
-          </a:xfrm>
-          <a:prstGeom prst="rect">
-            <a:avLst/>
-          </a:prstGeom>
-          <a:noFill/>
-        </p:spPr>
-        <p:txBody>
-          <a:bodyPr wrap="square">
-            <a:spAutoFit/>
-          </a:bodyPr>
-          <a:lstStyle/>
-          <a:p>
-            <a:pPr>
-              <a:spcAft>
-                <a:spcPts val="1170"/>
-              </a:spcAft>
-            </a:pPr>
-            <a:r>
-              <a:rPr sz="2600" b="1">
-                <a:solidFill>
-                  <a:srgbClr val="E8793A"/>
-                </a:solidFill>
-                <a:latin typeface="Nunito Sans"/>
-              </a:rPr>
-              <a:t>• </a:t>
-            </a:r>
-            <a:r>
-              <a:rPr sz="2600" b="0">
-                <a:solidFill>
                   <a:srgbClr val="1F2A44"/>
                 </a:solidFill>
                 <a:latin typeface="Nunito Sans"/>
               </a:rPr>
-              <a:t>Autor con nombre y oficio</a:t>
-            </a:r>
-          </a:p>
-          <a:p>
-            <a:pPr>
-              <a:spcAft>
-                <a:spcPts val="1170"/>
-              </a:spcAft>
-            </a:pPr>
-            <a:r>
-              <a:rPr sz="2600" b="1">
-                <a:solidFill>
-                  <a:srgbClr val="E8793A"/>
-                </a:solidFill>
-                <a:latin typeface="Nunito Sans"/>
-              </a:rPr>
-              <a:t>• </a:t>
-            </a:r>
-            <a:r>
-              <a:rPr sz="2600" b="0">
+              <a:t>con razones</a:t>
+            </a:r>
+            <a:r>
+              <a:rPr sz="2800" b="0">
                 <a:solidFill>
                   <a:srgbClr val="1F2A44"/>
                 </a:solidFill>
                 <a:latin typeface="Nunito Sans"/>
               </a:rPr>
-              <a:t>Enlaza a sus fuentes</a:t>
-            </a:r>
-          </a:p>
-          <a:p>
-            <a:pPr>
-              <a:spcAft>
-                <a:spcPts val="1170"/>
-              </a:spcAft>
-            </a:pPr>
-            <a:r>
-              <a:rPr sz="2600" b="1">
-                <a:solidFill>
-                  <a:srgbClr val="E8793A"/>
-                </a:solidFill>
-                <a:latin typeface="Nunito Sans"/>
-              </a:rPr>
-              <a:t>• </a:t>
-            </a:r>
-            <a:r>
-              <a:rPr sz="2600" b="0">
-                <a:solidFill>
-                  <a:srgbClr val="1F2A44"/>
-                </a:solidFill>
-                <a:latin typeface="Nunito Sans"/>
-              </a:rPr>
-              <a:t>Ha acertado otras veces en ese tema</a:t>
-            </a:r>
-          </a:p>
-          <a:p>
-            <a:pPr>
-              <a:spcAft>
-                <a:spcPts val="1170"/>
-              </a:spcAft>
-            </a:pPr>
-            <a:r>
-              <a:rPr sz="2600" b="1">
-                <a:solidFill>
-                  <a:srgbClr val="E8793A"/>
-                </a:solidFill>
-                <a:latin typeface="Nunito Sans"/>
-              </a:rPr>
-              <a:t>• </a:t>
-            </a:r>
-            <a:r>
-              <a:rPr sz="2600" b="0">
-                <a:solidFill>
-                  <a:srgbClr val="1F2A44"/>
-                </a:solidFill>
-                <a:latin typeface="Nunito Sans"/>
-              </a:rPr>
-              <a:t>Corrige sus errores en público</a:t>
+              <a:t> es otra cosa: «lo he comprobado»</a:t>
             </a:r>
           </a:p>
         </p:txBody>
@@ -7719,7 +7609,7 @@
     <p:bg>
       <p:bgPr>
         <a:solidFill>
-          <a:srgbClr val="1F2A44"/>
+          <a:srgbClr val="FBF7EF"/>
         </a:solidFill>
         <a:effectLst/>
       </p:bgPr>
@@ -7739,8 +7629,8 @@
         </p:nvSpPr>
         <p:spPr>
           <a:xfrm>
-            <a:off x="640000" y="2300000"/>
-            <a:ext cx="10912000" cy="500000"/>
+            <a:off x="640000" y="380000"/>
+            <a:ext cx="10912000" cy="420000"/>
           </a:xfrm>
           <a:prstGeom prst="rect">
             <a:avLst/>
@@ -7755,17 +7645,17 @@
           <a:p>
             <a:pPr>
               <a:spcAft>
-                <a:spcPts val="810"/>
-              </a:spcAft>
-            </a:pPr>
-            <a:r>
-              <a:rPr sz="1800" b="1">
-                <a:solidFill>
-                  <a:srgbClr val="F4B183"/>
-                </a:solidFill>
-                <a:latin typeface="Nunito Sans"/>
-              </a:rPr>
-              <a:t>BLOQUE 2</a:t>
+                <a:spcPts val="630"/>
+              </a:spcAft>
+            </a:pPr>
+            <a:r>
+              <a:rPr sz="1400" b="1">
+                <a:solidFill>
+                  <a:srgbClr val="E8793A"/>
+                </a:solidFill>
+                <a:latin typeface="Nunito Sans"/>
+              </a:rPr>
+              <a:t>BLOQUE 1 · TRES PALABRAS QUE SE CONFUNDEN</a:t>
             </a:r>
           </a:p>
         </p:txBody>
@@ -7778,7 +7668,7 @@
         </p:nvSpPr>
         <p:spPr>
           <a:xfrm>
-            <a:off x="640000" y="2800000"/>
+            <a:off x="640000" y="760000"/>
             <a:ext cx="10912000" cy="800000"/>
           </a:xfrm>
           <a:prstGeom prst="rect">
@@ -7794,21 +7684,320 @@
           <a:p>
             <a:pPr>
               <a:spcAft>
-                <a:spcPts val="2160"/>
-              </a:spcAft>
-            </a:pPr>
-            <a:r>
-              <a:rPr sz="4800" b="1">
-                <a:solidFill>
-                  <a:srgbClr val="FBF7EF"/>
+                <a:spcPts val="1710"/>
+              </a:spcAft>
+            </a:pPr>
+            <a:r>
+              <a:rPr sz="3800" b="1">
+                <a:solidFill>
+                  <a:srgbClr val="1F2A44"/>
                 </a:solidFill>
                 <a:latin typeface="Fredoka"/>
               </a:rPr>
-              <a:t>Casos resueltos</a:t>
-            </a:r>
-          </a:p>
-        </p:txBody>
-      </p:sp>
+              <a:t>Las tres palabras, juntas</a:t>
+            </a:r>
+          </a:p>
+        </p:txBody>
+      </p:sp>
+      <p:graphicFrame>
+        <p:nvGraphicFramePr>
+          <p:cNvPr id="4" name="Table 3"/>
+          <p:cNvGraphicFramePr>
+            <a:graphicFrameLocks noGrp="1"/>
+          </p:cNvGraphicFramePr>
+          <p:nvPr/>
+        </p:nvGraphicFramePr>
+        <p:xfrm>
+          <a:off x="640000" y="1700000"/>
+          <a:ext cx="10912000" cy="2400000"/>
+        </p:xfrm>
+        <a:graphic>
+          <a:graphicData uri="http://schemas.openxmlformats.org/drawingml/2006/table">
+            <a:tbl>
+              <a:tblPr firstRow="1" bandRow="1">
+                <a:tableStyleId>{5C22544A-7EE6-4342-B048-85BDC9FD1C3A}</a:tableStyleId>
+              </a:tblPr>
+              <a:tblGrid>
+                <a:gridCol w="3637333"/>
+                <a:gridCol w="3637333"/>
+                <a:gridCol w="3637334"/>
+              </a:tblGrid>
+              <a:tr h="600000">
+                <a:tc>
+                  <a:txBody>
+                    <a:bodyPr/>
+                    <a:lstStyle/>
+                    <a:p>
+                      <a:r>
+                        <a:rPr sz="2000" b="1">
+                          <a:solidFill>
+                            <a:srgbClr val="FBF7EF"/>
+                          </a:solidFill>
+                          <a:latin typeface="Fredoka"/>
+                        </a:rPr>
+                        <a:t>Palabra</a:t>
+                      </a:r>
+                    </a:p>
+                  </a:txBody>
+                  <a:tcPr>
+                    <a:solidFill>
+                      <a:srgbClr val="1F2A44"/>
+                    </a:solidFill>
+                  </a:tcPr>
+                </a:tc>
+                <a:tc>
+                  <a:txBody>
+                    <a:bodyPr/>
+                    <a:lstStyle/>
+                    <a:p>
+                      <a:r>
+                        <a:rPr sz="2000" b="1">
+                          <a:solidFill>
+                            <a:srgbClr val="FBF7EF"/>
+                          </a:solidFill>
+                          <a:latin typeface="Fredoka"/>
+                        </a:rPr>
+                        <a:t>Qué es</a:t>
+                      </a:r>
+                    </a:p>
+                  </a:txBody>
+                  <a:tcPr>
+                    <a:solidFill>
+                      <a:srgbClr val="1F2A44"/>
+                    </a:solidFill>
+                  </a:tcPr>
+                </a:tc>
+                <a:tc>
+                  <a:txBody>
+                    <a:bodyPr/>
+                    <a:lstStyle/>
+                    <a:p>
+                      <a:r>
+                        <a:rPr sz="2000" b="1">
+                          <a:solidFill>
+                            <a:srgbClr val="FBF7EF"/>
+                          </a:solidFill>
+                          <a:latin typeface="Fredoka"/>
+                        </a:rPr>
+                        <a:t>¿Puede fallar?</a:t>
+                      </a:r>
+                    </a:p>
+                  </a:txBody>
+                  <a:tcPr>
+                    <a:solidFill>
+                      <a:srgbClr val="1F2A44"/>
+                    </a:solidFill>
+                  </a:tcPr>
+                </a:tc>
+              </a:tr>
+              <a:tr h="600000">
+                <a:tc>
+                  <a:txBody>
+                    <a:bodyPr/>
+                    <a:lstStyle/>
+                    <a:p>
+                      <a:r>
+                        <a:rPr sz="2000" b="1">
+                          <a:solidFill>
+                            <a:srgbClr val="1F2A44"/>
+                          </a:solidFill>
+                          <a:latin typeface="Nunito Sans"/>
+                        </a:rPr>
+                        <a:t>Creer</a:t>
+                      </a:r>
+                    </a:p>
+                  </a:txBody>
+                  <a:tcPr>
+                    <a:solidFill>
+                      <a:srgbClr val="FFFFFF"/>
+                    </a:solidFill>
+                  </a:tcPr>
+                </a:tc>
+                <a:tc>
+                  <a:txBody>
+                    <a:bodyPr/>
+                    <a:lstStyle/>
+                    <a:p>
+                      <a:r>
+                        <a:rPr sz="2000" b="0">
+                          <a:solidFill>
+                            <a:srgbClr val="1F2A44"/>
+                          </a:solidFill>
+                          <a:latin typeface="Nunito Sans"/>
+                        </a:rPr>
+                        <a:t>Pensar que algo es verdad</a:t>
+                      </a:r>
+                    </a:p>
+                  </a:txBody>
+                  <a:tcPr>
+                    <a:solidFill>
+                      <a:srgbClr val="FFFFFF"/>
+                    </a:solidFill>
+                  </a:tcPr>
+                </a:tc>
+                <a:tc>
+                  <a:txBody>
+                    <a:bodyPr/>
+                    <a:lstStyle/>
+                    <a:p>
+                      <a:r>
+                        <a:rPr sz="2000" b="0">
+                          <a:solidFill>
+                            <a:srgbClr val="1F2A44"/>
+                          </a:solidFill>
+                          <a:latin typeface="Nunito Sans"/>
+                        </a:rPr>
+                        <a:t>Sí</a:t>
+                      </a:r>
+                    </a:p>
+                  </a:txBody>
+                  <a:tcPr>
+                    <a:solidFill>
+                      <a:srgbClr val="FFFFFF"/>
+                    </a:solidFill>
+                  </a:tcPr>
+                </a:tc>
+              </a:tr>
+              <a:tr h="600000">
+                <a:tc>
+                  <a:txBody>
+                    <a:bodyPr/>
+                    <a:lstStyle/>
+                    <a:p>
+                      <a:r>
+                        <a:rPr sz="2000" b="1">
+                          <a:solidFill>
+                            <a:srgbClr val="1F2A44"/>
+                          </a:solidFill>
+                          <a:latin typeface="Nunito Sans"/>
+                        </a:rPr>
+                        <a:t>Saber</a:t>
+                      </a:r>
+                    </a:p>
+                  </a:txBody>
+                  <a:tcPr>
+                    <a:solidFill>
+                      <a:srgbClr val="EAF0F7"/>
+                    </a:solidFill>
+                  </a:tcPr>
+                </a:tc>
+                <a:tc>
+                  <a:txBody>
+                    <a:bodyPr/>
+                    <a:lstStyle/>
+                    <a:p>
+                      <a:r>
+                        <a:rPr sz="2000" b="0">
+                          <a:solidFill>
+                            <a:srgbClr val="1F2A44"/>
+                          </a:solidFill>
+                          <a:latin typeface="Nunito Sans"/>
+                        </a:rPr>
+                        <a:t>Creer algo verdadero con buenas razones</a:t>
+                      </a:r>
+                    </a:p>
+                  </a:txBody>
+                  <a:tcPr>
+                    <a:solidFill>
+                      <a:srgbClr val="EAF0F7"/>
+                    </a:solidFill>
+                  </a:tcPr>
+                </a:tc>
+                <a:tc>
+                  <a:txBody>
+                    <a:bodyPr/>
+                    <a:lstStyle/>
+                    <a:p>
+                      <a:r>
+                        <a:rPr sz="2000" b="0">
+                          <a:solidFill>
+                            <a:srgbClr val="1F2A44"/>
+                          </a:solidFill>
+                          <a:latin typeface="Nunito Sans"/>
+                        </a:rPr>
+                        <a:t>No: si falla, no era saber</a:t>
+                      </a:r>
+                    </a:p>
+                  </a:txBody>
+                  <a:tcPr>
+                    <a:solidFill>
+                      <a:srgbClr val="EAF0F7"/>
+                    </a:solidFill>
+                  </a:tcPr>
+                </a:tc>
+              </a:tr>
+              <a:tr h="600000">
+                <a:tc>
+                  <a:txBody>
+                    <a:bodyPr/>
+                    <a:lstStyle/>
+                    <a:p>
+                      <a:r>
+                        <a:rPr sz="2000" b="1">
+                          <a:solidFill>
+                            <a:srgbClr val="1F2A44"/>
+                          </a:solidFill>
+                          <a:latin typeface="Nunito Sans"/>
+                        </a:rPr>
+                        <a:t>Sentirse seguro</a:t>
+                      </a:r>
+                    </a:p>
+                  </a:txBody>
+                  <a:tcPr>
+                    <a:solidFill>
+                      <a:srgbClr val="FFFFFF"/>
+                    </a:solidFill>
+                  </a:tcPr>
+                </a:tc>
+                <a:tc>
+                  <a:txBody>
+                    <a:bodyPr/>
+                    <a:lstStyle/>
+                    <a:p>
+                      <a:r>
+                        <a:rPr sz="2000" b="0">
+                          <a:solidFill>
+                            <a:srgbClr val="1F2A44"/>
+                          </a:solidFill>
+                          <a:latin typeface="Nunito Sans"/>
+                        </a:rPr>
+                        <a:t>Un sentimiento</a:t>
+                      </a:r>
+                    </a:p>
+                  </a:txBody>
+                  <a:tcPr>
+                    <a:solidFill>
+                      <a:srgbClr val="FFFFFF"/>
+                    </a:solidFill>
+                  </a:tcPr>
+                </a:tc>
+                <a:tc>
+                  <a:txBody>
+                    <a:bodyPr/>
+                    <a:lstStyle/>
+                    <a:p>
+                      <a:r>
+                        <a:rPr sz="2000" b="0">
+                          <a:solidFill>
+                            <a:srgbClr val="1F2A44"/>
+                          </a:solidFill>
+                          <a:latin typeface="Nunito Sans"/>
+                        </a:rPr>
+                        <a:t>Sí, muchas veces</a:t>
+                      </a:r>
+                    </a:p>
+                  </a:txBody>
+                  <a:tcPr>
+                    <a:solidFill>
+                      <a:srgbClr val="FFFFFF"/>
+                    </a:solidFill>
+                  </a:tcPr>
+                </a:tc>
+              </a:tr>
+            </a:tbl>
+          </a:graphicData>
+        </a:graphic>
+      </p:graphicFrame>
     </p:spTree>
   </p:cSld>
   <p:clrMapOvr>
